--- a/ai101/slides/week-13.pptx
+++ b/ai101/slides/week-13.pptx
@@ -3474,7 +3474,7 @@
                   <a:srgbClr val="1F2A37"/>
                 </a:solidFill>
               </a:rPr>
-              <a:t>• Like a Python dictionary</a:t>
+              <a:t>• Same shape as { role, content } from week 7</a:t>
             </a:r>
           </a:p>
           <a:p>
@@ -3489,7 +3489,22 @@
                   <a:srgbClr val="1F2A37"/>
                 </a:solidFill>
               </a:rPr>
-              <a:t>• Object.keys gives you every name</a:t>
+              <a:t>• The labels are just character names now</a:t>
+            </a:r>
+          </a:p>
+          <a:p>
+            <a:pPr>
+              <a:spcAft>
+                <a:spcPts val="1400"/>
+              </a:spcAft>
+            </a:pPr>
+            <a:r>
+              <a:rPr sz="2400">
+                <a:solidFill>
+                  <a:srgbClr val="1F2A37"/>
+                </a:solidFill>
+              </a:rPr>
+              <a:t>• Object.keys gives you every label</a:t>
             </a:r>
           </a:p>
         </p:txBody>

--- a/ai101/slides/week-13.pptx
+++ b/ai101/slides/week-13.pptx
@@ -12,6 +12,13 @@
     <p:sldId id="260" r:id="rId11"/>
     <p:sldId id="261" r:id="rId12"/>
     <p:sldId id="262" r:id="rId13"/>
+    <p:sldId id="263" r:id="rId14"/>
+    <p:sldId id="264" r:id="rId15"/>
+    <p:sldId id="265" r:id="rId16"/>
+    <p:sldId id="266" r:id="rId17"/>
+    <p:sldId id="267" r:id="rId18"/>
+    <p:sldId id="268" r:id="rId19"/>
+    <p:sldId id="269" r:id="rId20"/>
   </p:sldIdLst>
   <p:sldSz cx="12191695" cy="6858000" type="screen4x3"/>
   <p:notesSz cx="6858000" cy="9144000"/>
@@ -3166,6 +3173,911 @@
 </p:sld>
 </file>
 
+<file path=ppt/slides/slide10.xml><?xml version="1.0" encoding="utf-8"?>
+<p:sld xmlns:a="http://schemas.openxmlformats.org/drawingml/2006/main" xmlns:p="http://schemas.openxmlformats.org/presentationml/2006/main" xmlns:r="http://schemas.openxmlformats.org/officeDocument/2006/relationships">
+  <p:cSld>
+    <p:bg>
+      <p:bgPr>
+        <a:solidFill>
+          <a:srgbClr val="102127"/>
+        </a:solidFill>
+        <a:effectLst/>
+      </p:bgPr>
+    </p:bg>
+    <p:spTree>
+      <p:nvGrpSpPr>
+        <p:cNvPr id="1" name=""/>
+        <p:cNvGrpSpPr/>
+        <p:nvPr/>
+      </p:nvGrpSpPr>
+      <p:grpSpPr/>
+      <p:sp>
+        <p:nvSpPr>
+          <p:cNvPr id="2" name="TextBox 1"/>
+          <p:cNvSpPr txBox="1"/>
+          <p:nvPr/>
+        </p:nvSpPr>
+        <p:spPr>
+          <a:xfrm>
+            <a:off x="502920" y="274320"/>
+            <a:ext cx="11155680" cy="731520"/>
+          </a:xfrm>
+          <a:prstGeom prst="rect">
+            <a:avLst/>
+          </a:prstGeom>
+          <a:noFill/>
+        </p:spPr>
+        <p:txBody>
+          <a:bodyPr wrap="none">
+            <a:spAutoFit/>
+          </a:bodyPr>
+          <a:lstStyle/>
+          <a:p>
+            <a:r>
+              <a:rPr sz="2600" b="1">
+                <a:solidFill>
+                  <a:srgbClr val="01AEFD"/>
+                </a:solidFill>
+              </a:rPr>
+              <a:t>Type this into script.js  (4 of 6)</a:t>
+            </a:r>
+          </a:p>
+        </p:txBody>
+      </p:sp>
+      <p:sp>
+        <p:nvSpPr>
+          <p:cNvPr id="3" name="TextBox 2"/>
+          <p:cNvSpPr txBox="1"/>
+          <p:nvPr/>
+        </p:nvSpPr>
+        <p:spPr>
+          <a:xfrm>
+            <a:off x="502920" y="1051560"/>
+            <a:ext cx="11155680" cy="5394960"/>
+          </a:xfrm>
+          <a:prstGeom prst="rect">
+            <a:avLst/>
+          </a:prstGeom>
+          <a:noFill/>
+        </p:spPr>
+        <p:txBody>
+          <a:bodyPr wrap="none">
+            <a:spAutoFit/>
+          </a:bodyPr>
+          <a:lstStyle/>
+          <a:p>
+            <a:pPr>
+              <a:spcAft>
+                <a:spcPts val="0"/>
+              </a:spcAft>
+            </a:pPr>
+            <a:r>
+              <a:rPr sz="1700">
+                <a:solidFill>
+                  <a:srgbClr val="6D8C97"/>
+                </a:solidFill>
+                <a:latin typeface="Consolas"/>
+              </a:rPr>
+              <a:t> 166  </a:t>
+            </a:r>
+            <a:r>
+              <a:rPr sz="1700">
+                <a:solidFill>
+                  <a:srgbClr val="7FE0A0"/>
+                </a:solidFill>
+                <a:latin typeface="Consolas"/>
+              </a:rPr>
+              <a:t>  presetBox.appendChild(button);</a:t>
+            </a:r>
+          </a:p>
+          <a:p>
+            <a:pPr>
+              <a:spcAft>
+                <a:spcPts val="0"/>
+              </a:spcAft>
+            </a:pPr>
+            <a:r>
+              <a:rPr sz="1700">
+                <a:solidFill>
+                  <a:srgbClr val="6D8C97"/>
+                </a:solidFill>
+                <a:latin typeface="Consolas"/>
+              </a:rPr>
+              <a:t> 167  </a:t>
+            </a:r>
+            <a:r>
+              <a:rPr sz="1700">
+                <a:solidFill>
+                  <a:srgbClr val="7FE0A0"/>
+                </a:solidFill>
+                <a:latin typeface="Consolas"/>
+              </a:rPr>
+              <a:t>}</a:t>
+            </a:r>
+          </a:p>
+        </p:txBody>
+      </p:sp>
+    </p:spTree>
+  </p:cSld>
+  <p:clrMapOvr>
+    <a:masterClrMapping/>
+  </p:clrMapOvr>
+</p:sld>
+</file>
+
+<file path=ppt/slides/slide11.xml><?xml version="1.0" encoding="utf-8"?>
+<p:sld xmlns:a="http://schemas.openxmlformats.org/drawingml/2006/main" xmlns:p="http://schemas.openxmlformats.org/presentationml/2006/main" xmlns:r="http://schemas.openxmlformats.org/officeDocument/2006/relationships">
+  <p:cSld>
+    <p:bg>
+      <p:bgPr>
+        <a:solidFill>
+          <a:srgbClr val="102127"/>
+        </a:solidFill>
+        <a:effectLst/>
+      </p:bgPr>
+    </p:bg>
+    <p:spTree>
+      <p:nvGrpSpPr>
+        <p:cNvPr id="1" name=""/>
+        <p:cNvGrpSpPr/>
+        <p:nvPr/>
+      </p:nvGrpSpPr>
+      <p:grpSpPr/>
+      <p:sp>
+        <p:nvSpPr>
+          <p:cNvPr id="2" name="TextBox 1"/>
+          <p:cNvSpPr txBox="1"/>
+          <p:nvPr/>
+        </p:nvSpPr>
+        <p:spPr>
+          <a:xfrm>
+            <a:off x="502920" y="274320"/>
+            <a:ext cx="11155680" cy="731520"/>
+          </a:xfrm>
+          <a:prstGeom prst="rect">
+            <a:avLst/>
+          </a:prstGeom>
+          <a:noFill/>
+        </p:spPr>
+        <p:txBody>
+          <a:bodyPr wrap="none">
+            <a:spAutoFit/>
+          </a:bodyPr>
+          <a:lstStyle/>
+          <a:p>
+            <a:r>
+              <a:rPr sz="2600" b="1">
+                <a:solidFill>
+                  <a:srgbClr val="01AEFD"/>
+                </a:solidFill>
+              </a:rPr>
+              <a:t>Type this into style.css  (5 of 6)</a:t>
+            </a:r>
+          </a:p>
+        </p:txBody>
+      </p:sp>
+      <p:sp>
+        <p:nvSpPr>
+          <p:cNvPr id="3" name="TextBox 2"/>
+          <p:cNvSpPr txBox="1"/>
+          <p:nvPr/>
+        </p:nvSpPr>
+        <p:spPr>
+          <a:xfrm>
+            <a:off x="502920" y="1051560"/>
+            <a:ext cx="11155680" cy="5394960"/>
+          </a:xfrm>
+          <a:prstGeom prst="rect">
+            <a:avLst/>
+          </a:prstGeom>
+          <a:noFill/>
+        </p:spPr>
+        <p:txBody>
+          <a:bodyPr wrap="none">
+            <a:spAutoFit/>
+          </a:bodyPr>
+          <a:lstStyle/>
+          <a:p>
+            <a:pPr>
+              <a:spcAft>
+                <a:spcPts val="0"/>
+              </a:spcAft>
+            </a:pPr>
+            <a:r>
+              <a:rPr sz="1400">
+                <a:solidFill>
+                  <a:srgbClr val="6D8C97"/>
+                </a:solidFill>
+                <a:latin typeface="Consolas"/>
+              </a:rPr>
+              <a:t>  84  </a:t>
+            </a:r>
+            <a:r>
+              <a:rPr sz="1400">
+                <a:solidFill>
+                  <a:srgbClr val="DCECEF"/>
+                </a:solidFill>
+                <a:latin typeface="Consolas"/>
+              </a:rPr>
+              <a:t>.bubble.writing::after {</a:t>
+            </a:r>
+          </a:p>
+          <a:p>
+            <a:pPr>
+              <a:spcAft>
+                <a:spcPts val="0"/>
+              </a:spcAft>
+            </a:pPr>
+            <a:r>
+              <a:rPr sz="1400">
+                <a:solidFill>
+                  <a:srgbClr val="6D8C97"/>
+                </a:solidFill>
+                <a:latin typeface="Consolas"/>
+              </a:rPr>
+              <a:t>  85  </a:t>
+            </a:r>
+            <a:r>
+              <a:rPr sz="1400">
+                <a:solidFill>
+                  <a:srgbClr val="DCECEF"/>
+                </a:solidFill>
+                <a:latin typeface="Consolas"/>
+              </a:rPr>
+              <a:t>  content: "\258C";</a:t>
+            </a:r>
+          </a:p>
+          <a:p>
+            <a:pPr>
+              <a:spcAft>
+                <a:spcPts val="0"/>
+              </a:spcAft>
+            </a:pPr>
+            <a:r>
+              <a:rPr sz="1400">
+                <a:solidFill>
+                  <a:srgbClr val="6D8C97"/>
+                </a:solidFill>
+                <a:latin typeface="Consolas"/>
+              </a:rPr>
+              <a:t>  86  </a:t>
+            </a:r>
+            <a:r>
+              <a:rPr sz="1400">
+                <a:solidFill>
+                  <a:srgbClr val="DCECEF"/>
+                </a:solidFill>
+                <a:latin typeface="Consolas"/>
+              </a:rPr>
+              <a:t>  color: #01aefd;</a:t>
+            </a:r>
+          </a:p>
+          <a:p>
+            <a:pPr>
+              <a:spcAft>
+                <a:spcPts val="0"/>
+              </a:spcAft>
+            </a:pPr>
+            <a:r>
+              <a:rPr sz="1400">
+                <a:solidFill>
+                  <a:srgbClr val="6D8C97"/>
+                </a:solidFill>
+                <a:latin typeface="Consolas"/>
+              </a:rPr>
+              <a:t>  87  </a:t>
+            </a:r>
+            <a:r>
+              <a:rPr sz="1400">
+                <a:solidFill>
+                  <a:srgbClr val="DCECEF"/>
+                </a:solidFill>
+                <a:latin typeface="Consolas"/>
+              </a:rPr>
+              <a:t>  animation: blink 1s steps(2, start) infinite;</a:t>
+            </a:r>
+          </a:p>
+          <a:p>
+            <a:pPr>
+              <a:spcAft>
+                <a:spcPts val="0"/>
+              </a:spcAft>
+            </a:pPr>
+            <a:r>
+              <a:rPr sz="1400">
+                <a:solidFill>
+                  <a:srgbClr val="6D8C97"/>
+                </a:solidFill>
+                <a:latin typeface="Consolas"/>
+              </a:rPr>
+              <a:t>  88  </a:t>
+            </a:r>
+            <a:r>
+              <a:rPr sz="1400">
+                <a:solidFill>
+                  <a:srgbClr val="DCECEF"/>
+                </a:solidFill>
+                <a:latin typeface="Consolas"/>
+              </a:rPr>
+              <a:t>}</a:t>
+            </a:r>
+          </a:p>
+          <a:p>
+            <a:pPr>
+              <a:spcAft>
+                <a:spcPts val="0"/>
+              </a:spcAft>
+            </a:pPr>
+            <a:r>
+              <a:rPr sz="1400">
+                <a:solidFill>
+                  <a:srgbClr val="6D8C97"/>
+                </a:solidFill>
+                <a:latin typeface="Consolas"/>
+              </a:rPr>
+              <a:t>  89  </a:t>
+            </a:r>
+            <a:r>
+              <a:rPr sz="1400">
+                <a:solidFill>
+                  <a:srgbClr val="DCECEF"/>
+                </a:solidFill>
+                <a:latin typeface="Consolas"/>
+              </a:rPr>
+              <a:t>@keyframes blink { to { visibility: hidden; } }</a:t>
+            </a:r>
+          </a:p>
+          <a:p>
+            <a:pPr>
+              <a:spcAft>
+                <a:spcPts val="0"/>
+              </a:spcAft>
+            </a:pPr>
+            <a:r>
+              <a:rPr sz="1400">
+                <a:solidFill>
+                  <a:srgbClr val="6D8C97"/>
+                </a:solidFill>
+                <a:latin typeface="Consolas"/>
+              </a:rPr>
+              <a:t>  90  </a:t>
+            </a:r>
+            <a:r>
+              <a:rPr sz="1400">
+                <a:solidFill>
+                  <a:srgbClr val="7FE0A0"/>
+                </a:solidFill>
+                <a:latin typeface="Consolas"/>
+              </a:rPr>
+              <a:t>.presets { display: flex; flex-wrap: wrap; gap: 6px; margin-bottom: 8px; }</a:t>
+            </a:r>
+          </a:p>
+          <a:p>
+            <a:pPr>
+              <a:spcAft>
+                <a:spcPts val="0"/>
+              </a:spcAft>
+            </a:pPr>
+            <a:r>
+              <a:rPr sz="1400">
+                <a:solidFill>
+                  <a:srgbClr val="6D8C97"/>
+                </a:solidFill>
+                <a:latin typeface="Consolas"/>
+              </a:rPr>
+              <a:t>  91  </a:t>
+            </a:r>
+            <a:r>
+              <a:rPr sz="1400">
+                <a:solidFill>
+                  <a:srgbClr val="7FE0A0"/>
+                </a:solidFill>
+                <a:latin typeface="Consolas"/>
+              </a:rPr>
+              <a:t>.preset {</a:t>
+            </a:r>
+          </a:p>
+          <a:p>
+            <a:pPr>
+              <a:spcAft>
+                <a:spcPts val="0"/>
+              </a:spcAft>
+            </a:pPr>
+            <a:r>
+              <a:rPr sz="1400">
+                <a:solidFill>
+                  <a:srgbClr val="6D8C97"/>
+                </a:solidFill>
+                <a:latin typeface="Consolas"/>
+              </a:rPr>
+              <a:t>  92  </a:t>
+            </a:r>
+            <a:r>
+              <a:rPr sz="1400">
+                <a:solidFill>
+                  <a:srgbClr val="7FE0A0"/>
+                </a:solidFill>
+                <a:latin typeface="Consolas"/>
+              </a:rPr>
+              <a:t>  padding: 5px 11px;</a:t>
+            </a:r>
+          </a:p>
+          <a:p>
+            <a:pPr>
+              <a:spcAft>
+                <a:spcPts val="0"/>
+              </a:spcAft>
+            </a:pPr>
+            <a:r>
+              <a:rPr sz="1400">
+                <a:solidFill>
+                  <a:srgbClr val="6D8C97"/>
+                </a:solidFill>
+                <a:latin typeface="Consolas"/>
+              </a:rPr>
+              <a:t>  93  </a:t>
+            </a:r>
+            <a:r>
+              <a:rPr sz="1400">
+                <a:solidFill>
+                  <a:srgbClr val="7FE0A0"/>
+                </a:solidFill>
+                <a:latin typeface="Consolas"/>
+              </a:rPr>
+              <a:t>  border: 1px solid #dbe3ec;</a:t>
+            </a:r>
+          </a:p>
+          <a:p>
+            <a:pPr>
+              <a:spcAft>
+                <a:spcPts val="0"/>
+              </a:spcAft>
+            </a:pPr>
+            <a:r>
+              <a:rPr sz="1400">
+                <a:solidFill>
+                  <a:srgbClr val="6D8C97"/>
+                </a:solidFill>
+                <a:latin typeface="Consolas"/>
+              </a:rPr>
+              <a:t>  94  </a:t>
+            </a:r>
+            <a:r>
+              <a:rPr sz="1400">
+                <a:solidFill>
+                  <a:srgbClr val="7FE0A0"/>
+                </a:solidFill>
+                <a:latin typeface="Consolas"/>
+              </a:rPr>
+              <a:t>  border-radius: 20px;</a:t>
+            </a:r>
+          </a:p>
+          <a:p>
+            <a:pPr>
+              <a:spcAft>
+                <a:spcPts val="0"/>
+              </a:spcAft>
+            </a:pPr>
+            <a:r>
+              <a:rPr sz="1400">
+                <a:solidFill>
+                  <a:srgbClr val="6D8C97"/>
+                </a:solidFill>
+                <a:latin typeface="Consolas"/>
+              </a:rPr>
+              <a:t>  95  </a:t>
+            </a:r>
+            <a:r>
+              <a:rPr sz="1400">
+                <a:solidFill>
+                  <a:srgbClr val="7FE0A0"/>
+                </a:solidFill>
+                <a:latin typeface="Consolas"/>
+              </a:rPr>
+              <a:t>  background: #ffffff;</a:t>
+            </a:r>
+          </a:p>
+          <a:p>
+            <a:pPr>
+              <a:spcAft>
+                <a:spcPts val="0"/>
+              </a:spcAft>
+            </a:pPr>
+            <a:r>
+              <a:rPr sz="1400">
+                <a:solidFill>
+                  <a:srgbClr val="6D8C97"/>
+                </a:solidFill>
+                <a:latin typeface="Consolas"/>
+              </a:rPr>
+              <a:t>  96  </a:t>
+            </a:r>
+            <a:r>
+              <a:rPr sz="1400">
+                <a:solidFill>
+                  <a:srgbClr val="7FE0A0"/>
+                </a:solidFill>
+                <a:latin typeface="Consolas"/>
+              </a:rPr>
+              <a:t>  font-size: 13px;</a:t>
+            </a:r>
+          </a:p>
+          <a:p>
+            <a:pPr>
+              <a:spcAft>
+                <a:spcPts val="0"/>
+              </a:spcAft>
+            </a:pPr>
+            <a:r>
+              <a:rPr sz="1400">
+                <a:solidFill>
+                  <a:srgbClr val="6D8C97"/>
+                </a:solidFill>
+                <a:latin typeface="Consolas"/>
+              </a:rPr>
+              <a:t>  97  </a:t>
+            </a:r>
+            <a:r>
+              <a:rPr sz="1400">
+                <a:solidFill>
+                  <a:srgbClr val="7FE0A0"/>
+                </a:solidFill>
+                <a:latin typeface="Consolas"/>
+              </a:rPr>
+              <a:t>  cursor: pointer;</a:t>
+            </a:r>
+          </a:p>
+          <a:p>
+            <a:pPr>
+              <a:spcAft>
+                <a:spcPts val="0"/>
+              </a:spcAft>
+            </a:pPr>
+            <a:r>
+              <a:rPr sz="1400">
+                <a:solidFill>
+                  <a:srgbClr val="6D8C97"/>
+                </a:solidFill>
+                <a:latin typeface="Consolas"/>
+              </a:rPr>
+              <a:t>  98  </a:t>
+            </a:r>
+            <a:r>
+              <a:rPr sz="1400">
+                <a:solidFill>
+                  <a:srgbClr val="7FE0A0"/>
+                </a:solidFill>
+                <a:latin typeface="Consolas"/>
+              </a:rPr>
+              <a:t>}</a:t>
+            </a:r>
+          </a:p>
+        </p:txBody>
+      </p:sp>
+    </p:spTree>
+  </p:cSld>
+  <p:clrMapOvr>
+    <a:masterClrMapping/>
+  </p:clrMapOvr>
+</p:sld>
+</file>
+
+<file path=ppt/slides/slide12.xml><?xml version="1.0" encoding="utf-8"?>
+<p:sld xmlns:a="http://schemas.openxmlformats.org/drawingml/2006/main" xmlns:p="http://schemas.openxmlformats.org/presentationml/2006/main" xmlns:r="http://schemas.openxmlformats.org/officeDocument/2006/relationships">
+  <p:cSld>
+    <p:bg>
+      <p:bgPr>
+        <a:solidFill>
+          <a:srgbClr val="102127"/>
+        </a:solidFill>
+        <a:effectLst/>
+      </p:bgPr>
+    </p:bg>
+    <p:spTree>
+      <p:nvGrpSpPr>
+        <p:cNvPr id="1" name=""/>
+        <p:cNvGrpSpPr/>
+        <p:nvPr/>
+      </p:nvGrpSpPr>
+      <p:grpSpPr/>
+      <p:sp>
+        <p:nvSpPr>
+          <p:cNvPr id="2" name="TextBox 1"/>
+          <p:cNvSpPr txBox="1"/>
+          <p:nvPr/>
+        </p:nvSpPr>
+        <p:spPr>
+          <a:xfrm>
+            <a:off x="502920" y="274320"/>
+            <a:ext cx="11155680" cy="731520"/>
+          </a:xfrm>
+          <a:prstGeom prst="rect">
+            <a:avLst/>
+          </a:prstGeom>
+          <a:noFill/>
+        </p:spPr>
+        <p:txBody>
+          <a:bodyPr wrap="none">
+            <a:spAutoFit/>
+          </a:bodyPr>
+          <a:lstStyle/>
+          <a:p>
+            <a:r>
+              <a:rPr sz="2600" b="1">
+                <a:solidFill>
+                  <a:srgbClr val="01AEFD"/>
+                </a:solidFill>
+              </a:rPr>
+              <a:t>Type this into style.css  (6 of 6)</a:t>
+            </a:r>
+          </a:p>
+        </p:txBody>
+      </p:sp>
+      <p:sp>
+        <p:nvSpPr>
+          <p:cNvPr id="3" name="TextBox 2"/>
+          <p:cNvSpPr txBox="1"/>
+          <p:nvPr/>
+        </p:nvSpPr>
+        <p:spPr>
+          <a:xfrm>
+            <a:off x="502920" y="1051560"/>
+            <a:ext cx="11155680" cy="5394960"/>
+          </a:xfrm>
+          <a:prstGeom prst="rect">
+            <a:avLst/>
+          </a:prstGeom>
+          <a:noFill/>
+        </p:spPr>
+        <p:txBody>
+          <a:bodyPr wrap="none">
+            <a:spAutoFit/>
+          </a:bodyPr>
+          <a:lstStyle/>
+          <a:p>
+            <a:pPr>
+              <a:spcAft>
+                <a:spcPts val="0"/>
+              </a:spcAft>
+            </a:pPr>
+            <a:r>
+              <a:rPr sz="1700">
+                <a:solidFill>
+                  <a:srgbClr val="6D8C97"/>
+                </a:solidFill>
+                <a:latin typeface="Consolas"/>
+              </a:rPr>
+              <a:t>  99  </a:t>
+            </a:r>
+            <a:r>
+              <a:rPr sz="1700">
+                <a:solidFill>
+                  <a:srgbClr val="7FE0A0"/>
+                </a:solidFill>
+                <a:latin typeface="Consolas"/>
+              </a:rPr>
+              <a:t>.preset:hover { border-color: #01aefd; color: #0a6299; }</a:t>
+            </a:r>
+          </a:p>
+        </p:txBody>
+      </p:sp>
+    </p:spTree>
+  </p:cSld>
+  <p:clrMapOvr>
+    <a:masterClrMapping/>
+  </p:clrMapOvr>
+</p:sld>
+</file>
+
+<file path=ppt/slides/slide13.xml><?xml version="1.0" encoding="utf-8"?>
+<p:sld xmlns:a="http://schemas.openxmlformats.org/drawingml/2006/main" xmlns:p="http://schemas.openxmlformats.org/presentationml/2006/main" xmlns:r="http://schemas.openxmlformats.org/officeDocument/2006/relationships">
+  <p:cSld>
+    <p:spTree>
+      <p:nvGrpSpPr>
+        <p:cNvPr id="1" name=""/>
+        <p:cNvGrpSpPr/>
+        <p:nvPr/>
+      </p:nvGrpSpPr>
+      <p:grpSpPr/>
+      <p:sp>
+        <p:nvSpPr>
+          <p:cNvPr id="2" name="Title 1"/>
+          <p:cNvSpPr>
+            <a:spLocks noGrp="1"/>
+          </p:cNvSpPr>
+          <p:nvPr>
+            <p:ph type="title"/>
+          </p:nvPr>
+        </p:nvSpPr>
+        <p:spPr/>
+        <p:txBody>
+          <a:bodyPr/>
+          <a:lstStyle/>
+          <a:p>
+            <a:r>
+              <a:rPr sz="3800" b="1">
+                <a:solidFill>
+                  <a:srgbClr val="1F2A37"/>
+                </a:solidFill>
+              </a:rPr>
+              <a:t>One source of truth</a:t>
+            </a:r>
+          </a:p>
+        </p:txBody>
+      </p:sp>
+      <p:sp>
+        <p:nvSpPr>
+          <p:cNvPr id="3" name="TextBox 2"/>
+          <p:cNvSpPr txBox="1"/>
+          <p:nvPr/>
+        </p:nvSpPr>
+        <p:spPr>
+          <a:xfrm>
+            <a:off x="822960" y="1828800"/>
+            <a:ext cx="10515600" cy="4206240"/>
+          </a:xfrm>
+          <a:prstGeom prst="rect">
+            <a:avLst/>
+          </a:prstGeom>
+          <a:noFill/>
+        </p:spPr>
+        <p:txBody>
+          <a:bodyPr wrap="square">
+            <a:spAutoFit/>
+          </a:bodyPr>
+          <a:lstStyle/>
+          <a:p>
+            <a:pPr>
+              <a:spcAft>
+                <a:spcPts val="1400"/>
+              </a:spcAft>
+            </a:pPr>
+            <a:r>
+              <a:rPr sz="2400">
+                <a:solidFill>
+                  <a:srgbClr val="1F2A37"/>
+                </a:solidFill>
+              </a:rPr>
+              <a:t>• The buttons come from the personalities</a:t>
+            </a:r>
+          </a:p>
+          <a:p>
+            <a:pPr>
+              <a:spcAft>
+                <a:spcPts val="1400"/>
+              </a:spcAft>
+            </a:pPr>
+            <a:r>
+              <a:rPr sz="2400">
+                <a:solidFill>
+                  <a:srgbClr val="1F2A37"/>
+                </a:solidFill>
+              </a:rPr>
+              <a:t>• They can never disagree with each other</a:t>
+            </a:r>
+          </a:p>
+        </p:txBody>
+      </p:sp>
+    </p:spTree>
+  </p:cSld>
+  <p:clrMapOvr>
+    <a:masterClrMapping/>
+  </p:clrMapOvr>
+</p:sld>
+</file>
+
+<file path=ppt/slides/slide14.xml><?xml version="1.0" encoding="utf-8"?>
+<p:sld xmlns:a="http://schemas.openxmlformats.org/drawingml/2006/main" xmlns:p="http://schemas.openxmlformats.org/presentationml/2006/main" xmlns:r="http://schemas.openxmlformats.org/officeDocument/2006/relationships">
+  <p:cSld>
+    <p:spTree>
+      <p:nvGrpSpPr>
+        <p:cNvPr id="1" name=""/>
+        <p:cNvGrpSpPr/>
+        <p:nvPr/>
+      </p:nvGrpSpPr>
+      <p:grpSpPr/>
+      <p:sp>
+        <p:nvSpPr>
+          <p:cNvPr id="2" name="Title 1"/>
+          <p:cNvSpPr>
+            <a:spLocks noGrp="1"/>
+          </p:cNvSpPr>
+          <p:nvPr>
+            <p:ph type="title"/>
+          </p:nvPr>
+        </p:nvSpPr>
+        <p:spPr/>
+        <p:txBody>
+          <a:bodyPr/>
+          <a:lstStyle/>
+          <a:p>
+            <a:r>
+              <a:rPr sz="3800" b="1">
+                <a:solidFill>
+                  <a:srgbClr val="1F2A37"/>
+                </a:solidFill>
+              </a:rPr>
+              <a:t>Now make it yours</a:t>
+            </a:r>
+          </a:p>
+        </p:txBody>
+      </p:sp>
+      <p:sp>
+        <p:nvSpPr>
+          <p:cNvPr id="3" name="TextBox 2"/>
+          <p:cNvSpPr txBox="1"/>
+          <p:nvPr/>
+        </p:nvSpPr>
+        <p:spPr>
+          <a:xfrm>
+            <a:off x="822960" y="1828800"/>
+            <a:ext cx="10515600" cy="4206240"/>
+          </a:xfrm>
+          <a:prstGeom prst="rect">
+            <a:avLst/>
+          </a:prstGeom>
+          <a:noFill/>
+        </p:spPr>
+        <p:txBody>
+          <a:bodyPr wrap="square">
+            <a:spAutoFit/>
+          </a:bodyPr>
+          <a:lstStyle/>
+          <a:p>
+            <a:pPr>
+              <a:spcAft>
+                <a:spcPts val="1400"/>
+              </a:spcAft>
+            </a:pPr>
+            <a:r>
+              <a:rPr sz="2800">
+                <a:solidFill>
+                  <a:srgbClr val="01AEFD"/>
+                </a:solidFill>
+              </a:rPr>
+              <a:t>Colours, font, name, characters</a:t>
+            </a:r>
+          </a:p>
+          <a:p>
+            <a:pPr>
+              <a:spcAft>
+                <a:spcPts val="1400"/>
+              </a:spcAft>
+            </a:pPr>
+            <a:r>
+              <a:rPr sz="2400">
+                <a:solidFill>
+                  <a:srgbClr val="1F2A37"/>
+                </a:solidFill>
+              </a:rPr>
+              <a:t>• It should look like nobody else's</a:t>
+            </a:r>
+          </a:p>
+          <a:p>
+            <a:pPr>
+              <a:spcAft>
+                <a:spcPts val="1400"/>
+              </a:spcAft>
+            </a:pPr>
+            <a:r>
+              <a:rPr sz="2400">
+                <a:solidFill>
+                  <a:srgbClr val="1F2A37"/>
+                </a:solidFill>
+              </a:rPr>
+              <a:t>• Week 15 is show and tell</a:t>
+            </a:r>
+          </a:p>
+        </p:txBody>
+      </p:sp>
+    </p:spTree>
+  </p:cSld>
+  <p:clrMapOvr>
+    <a:masterClrMapping/>
+  </p:clrMapOvr>
+</p:sld>
+</file>
+
 <file path=ppt/slides/slide2.xml><?xml version="1.0" encoding="utf-8"?>
 <p:sld xmlns:a="http://schemas.openxmlformats.org/drawingml/2006/main" xmlns:p="http://schemas.openxmlformats.org/presentationml/2006/main" xmlns:r="http://schemas.openxmlformats.org/officeDocument/2006/relationships">
   <p:cSld>
@@ -3520,6 +4432,14 @@
 <file path=ppt/slides/slide5.xml><?xml version="1.0" encoding="utf-8"?>
 <p:sld xmlns:a="http://schemas.openxmlformats.org/drawingml/2006/main" xmlns:p="http://schemas.openxmlformats.org/presentationml/2006/main" xmlns:r="http://schemas.openxmlformats.org/officeDocument/2006/relationships">
   <p:cSld>
+    <p:bg>
+      <p:bgPr>
+        <a:solidFill>
+          <a:srgbClr val="102127"/>
+        </a:solidFill>
+        <a:effectLst/>
+      </p:bgPr>
+    </p:bg>
     <p:spTree>
       <p:nvGrpSpPr>
         <p:cNvPr id="1" name=""/>
@@ -3529,40 +4449,14 @@
       <p:grpSpPr/>
       <p:sp>
         <p:nvSpPr>
-          <p:cNvPr id="2" name="Title 1"/>
-          <p:cNvSpPr>
-            <a:spLocks noGrp="1"/>
-          </p:cNvSpPr>
-          <p:nvPr>
-            <p:ph type="title"/>
-          </p:nvPr>
-        </p:nvSpPr>
-        <p:spPr/>
-        <p:txBody>
-          <a:bodyPr/>
-          <a:lstStyle/>
-          <a:p>
-            <a:r>
-              <a:rPr sz="3800" b="1">
-                <a:solidFill>
-                  <a:srgbClr val="1F2A37"/>
-                </a:solidFill>
-              </a:rPr>
-              <a:t>Add a fifth character</a:t>
-            </a:r>
-          </a:p>
-        </p:txBody>
-      </p:sp>
-      <p:sp>
-        <p:nvSpPr>
-          <p:cNvPr id="3" name="TextBox 2"/>
+          <p:cNvPr id="2" name="TextBox 1"/>
           <p:cNvSpPr txBox="1"/>
           <p:nvPr/>
         </p:nvSpPr>
         <p:spPr>
           <a:xfrm>
-            <a:off x="822960" y="1828800"/>
-            <a:ext cx="10515600" cy="4206240"/>
+            <a:off x="502920" y="274320"/>
+            <a:ext cx="11155680" cy="731520"/>
           </a:xfrm>
           <a:prstGeom prst="rect">
             <a:avLst/>
@@ -3570,68 +4464,266 @@
           <a:noFill/>
         </p:spPr>
         <p:txBody>
-          <a:bodyPr wrap="square">
+          <a:bodyPr wrap="none">
             <a:spAutoFit/>
           </a:bodyPr>
           <a:lstStyle/>
           <a:p>
-            <a:pPr>
-              <a:spcAft>
-                <a:spcPts val="1400"/>
-              </a:spcAft>
-            </a:pPr>
-            <a:r>
-              <a:rPr sz="2800">
+            <a:r>
+              <a:rPr sz="2600" b="1">
                 <a:solidFill>
                   <a:srgbClr val="01AEFD"/>
                 </a:solidFill>
               </a:rPr>
-              <a:t>Watch what happens</a:t>
-            </a:r>
-          </a:p>
-          <a:p>
-            <a:pPr>
-              <a:spcAft>
-                <a:spcPts val="1400"/>
-              </a:spcAft>
-            </a:pPr>
-            <a:r>
-              <a:rPr sz="2400">
-                <a:solidFill>
-                  <a:srgbClr val="1F2A37"/>
-                </a:solidFill>
-              </a:rPr>
-              <a:t>• One new line in PRESETS</a:t>
-            </a:r>
-          </a:p>
-          <a:p>
-            <a:pPr>
-              <a:spcAft>
-                <a:spcPts val="1400"/>
-              </a:spcAft>
-            </a:pPr>
-            <a:r>
-              <a:rPr sz="2400">
-                <a:solidFill>
-                  <a:srgbClr val="1F2A37"/>
-                </a:solidFill>
-              </a:rPr>
-              <a:t>• A new button appears</a:t>
-            </a:r>
-          </a:p>
-          <a:p>
-            <a:pPr>
-              <a:spcAft>
-                <a:spcPts val="1400"/>
-              </a:spcAft>
-            </a:pPr>
-            <a:r>
-              <a:rPr sz="2400">
-                <a:solidFill>
-                  <a:srgbClr val="1F2A37"/>
-                </a:solidFill>
-              </a:rPr>
-              <a:t>• You wrote no new code</a:t>
+              <a:t>Type this into script.js</a:t>
+            </a:r>
+          </a:p>
+        </p:txBody>
+      </p:sp>
+      <p:sp>
+        <p:nvSpPr>
+          <p:cNvPr id="3" name="TextBox 2"/>
+          <p:cNvSpPr txBox="1"/>
+          <p:nvPr/>
+        </p:nvSpPr>
+        <p:spPr>
+          <a:xfrm>
+            <a:off x="502920" y="1051560"/>
+            <a:ext cx="11155680" cy="5394960"/>
+          </a:xfrm>
+          <a:prstGeom prst="rect">
+            <a:avLst/>
+          </a:prstGeom>
+          <a:noFill/>
+        </p:spPr>
+        <p:txBody>
+          <a:bodyPr wrap="none">
+            <a:spAutoFit/>
+          </a:bodyPr>
+          <a:lstStyle/>
+          <a:p>
+            <a:pPr>
+              <a:spcAft>
+                <a:spcPts val="0"/>
+              </a:spcAft>
+            </a:pPr>
+            <a:r>
+              <a:rPr sz="1700">
+                <a:solidFill>
+                  <a:srgbClr val="6D8C97"/>
+                </a:solidFill>
+                <a:latin typeface="Consolas"/>
+              </a:rPr>
+              <a:t>  26  </a:t>
+            </a:r>
+            <a:r>
+              <a:rPr sz="1700">
+                <a:solidFill>
+                  <a:srgbClr val="7FE0A0"/>
+                </a:solidFill>
+                <a:latin typeface="Consolas"/>
+              </a:rPr>
+              <a:t> </a:t>
+            </a:r>
+          </a:p>
+          <a:p>
+            <a:pPr>
+              <a:spcAft>
+                <a:spcPts val="0"/>
+              </a:spcAft>
+            </a:pPr>
+            <a:r>
+              <a:rPr sz="1700">
+                <a:solidFill>
+                  <a:srgbClr val="6D8C97"/>
+                </a:solidFill>
+                <a:latin typeface="Consolas"/>
+              </a:rPr>
+              <a:t>  27  </a:t>
+            </a:r>
+            <a:r>
+              <a:rPr sz="1700">
+                <a:solidFill>
+                  <a:srgbClr val="7FE0A0"/>
+                </a:solidFill>
+                <a:latin typeface="Consolas"/>
+              </a:rPr>
+              <a:t>// Week 13: personalities as DATA, not as code. Adding a character means</a:t>
+            </a:r>
+          </a:p>
+          <a:p>
+            <a:pPr>
+              <a:spcAft>
+                <a:spcPts val="0"/>
+              </a:spcAft>
+            </a:pPr>
+            <a:r>
+              <a:rPr sz="1700">
+                <a:solidFill>
+                  <a:srgbClr val="6D8C97"/>
+                </a:solidFill>
+                <a:latin typeface="Consolas"/>
+              </a:rPr>
+              <a:t>  28  </a:t>
+            </a:r>
+            <a:r>
+              <a:rPr sz="1700">
+                <a:solidFill>
+                  <a:srgbClr val="7FE0A0"/>
+                </a:solidFill>
+                <a:latin typeface="Consolas"/>
+              </a:rPr>
+              <a:t>// adding one line here - the buttons build themselves from this object.</a:t>
+            </a:r>
+          </a:p>
+          <a:p>
+            <a:pPr>
+              <a:spcAft>
+                <a:spcPts val="0"/>
+              </a:spcAft>
+            </a:pPr>
+            <a:r>
+              <a:rPr sz="1700">
+                <a:solidFill>
+                  <a:srgbClr val="6D8C97"/>
+                </a:solidFill>
+                <a:latin typeface="Consolas"/>
+              </a:rPr>
+              <a:t>  29  </a:t>
+            </a:r>
+            <a:r>
+              <a:rPr sz="1700">
+                <a:solidFill>
+                  <a:srgbClr val="7FE0A0"/>
+                </a:solidFill>
+                <a:latin typeface="Consolas"/>
+              </a:rPr>
+              <a:t>const PRESETS = {</a:t>
+            </a:r>
+          </a:p>
+          <a:p>
+            <a:pPr>
+              <a:spcAft>
+                <a:spcPts val="0"/>
+              </a:spcAft>
+            </a:pPr>
+            <a:r>
+              <a:rPr sz="1700">
+                <a:solidFill>
+                  <a:srgbClr val="6D8C97"/>
+                </a:solidFill>
+                <a:latin typeface="Consolas"/>
+              </a:rPr>
+              <a:t>  30  </a:t>
+            </a:r>
+            <a:r>
+              <a:rPr sz="1700">
+                <a:solidFill>
+                  <a:srgbClr val="7FE0A0"/>
+                </a:solidFill>
+                <a:latin typeface="Consolas"/>
+              </a:rPr>
+              <a:t>  'Patient helper': 'You are a friendly, patient helper for a 13-year-old. Keep answers under 60 words. If you are not sure, say so.',</a:t>
+            </a:r>
+          </a:p>
+          <a:p>
+            <a:pPr>
+              <a:spcAft>
+                <a:spcPts val="0"/>
+              </a:spcAft>
+            </a:pPr>
+            <a:r>
+              <a:rPr sz="1700">
+                <a:solidFill>
+                  <a:srgbClr val="6D8C97"/>
+                </a:solidFill>
+                <a:latin typeface="Consolas"/>
+              </a:rPr>
+              <a:t>  31  </a:t>
+            </a:r>
+            <a:r>
+              <a:rPr sz="1700">
+                <a:solidFill>
+                  <a:srgbClr val="7FE0A0"/>
+                </a:solidFill>
+                <a:latin typeface="Consolas"/>
+              </a:rPr>
+              <a:t>  'Storyteller': 'You tell short adventure stories. Always end on a cliffhanger and offer two choices for what happens next.',</a:t>
+            </a:r>
+          </a:p>
+          <a:p>
+            <a:pPr>
+              <a:spcAft>
+                <a:spcPts val="0"/>
+              </a:spcAft>
+            </a:pPr>
+            <a:r>
+              <a:rPr sz="1700">
+                <a:solidFill>
+                  <a:srgbClr val="6D8C97"/>
+                </a:solidFill>
+                <a:latin typeface="Consolas"/>
+              </a:rPr>
+              <a:t>  32  </a:t>
+            </a:r>
+            <a:r>
+              <a:rPr sz="1700">
+                <a:solidFill>
+                  <a:srgbClr val="7FE0A0"/>
+                </a:solidFill>
+                <a:latin typeface="Consolas"/>
+              </a:rPr>
+              <a:t>  'Quiz master': 'You ask one multiple-choice question at a time about whatever topic the user names. Wait for an answer before saying if it was right.',</a:t>
+            </a:r>
+          </a:p>
+          <a:p>
+            <a:pPr>
+              <a:spcAft>
+                <a:spcPts val="0"/>
+              </a:spcAft>
+            </a:pPr>
+            <a:r>
+              <a:rPr sz="1700">
+                <a:solidFill>
+                  <a:srgbClr val="6D8C97"/>
+                </a:solidFill>
+                <a:latin typeface="Consolas"/>
+              </a:rPr>
+              <a:t>  33  </a:t>
+            </a:r>
+            <a:r>
+              <a:rPr sz="1700">
+                <a:solidFill>
+                  <a:srgbClr val="7FE0A0"/>
+                </a:solidFill>
+                <a:latin typeface="Consolas"/>
+              </a:rPr>
+              <a:t>  'Rubber duck': 'You never give answers. You only ask short questions that help the user work it out themselves.'</a:t>
+            </a:r>
+          </a:p>
+          <a:p>
+            <a:pPr>
+              <a:spcAft>
+                <a:spcPts val="0"/>
+              </a:spcAft>
+            </a:pPr>
+            <a:r>
+              <a:rPr sz="1700">
+                <a:solidFill>
+                  <a:srgbClr val="6D8C97"/>
+                </a:solidFill>
+                <a:latin typeface="Consolas"/>
+              </a:rPr>
+              <a:t>  34  </a:t>
+            </a:r>
+            <a:r>
+              <a:rPr sz="1700">
+                <a:solidFill>
+                  <a:srgbClr val="7FE0A0"/>
+                </a:solidFill>
+                <a:latin typeface="Consolas"/>
+              </a:rPr>
+              <a:t>};</a:t>
             </a:r>
           </a:p>
         </p:txBody>
@@ -3675,7 +4767,7 @@
                   <a:srgbClr val="1F2A37"/>
                 </a:solidFill>
               </a:rPr>
-              <a:t>One source of truth</a:t>
+              <a:t>Add a fifth character</a:t>
             </a:r>
           </a:p>
         </p:txBody>
@@ -3708,12 +4800,27 @@
               </a:spcAft>
             </a:pPr>
             <a:r>
+              <a:rPr sz="2800">
+                <a:solidFill>
+                  <a:srgbClr val="01AEFD"/>
+                </a:solidFill>
+              </a:rPr>
+              <a:t>Watch what happens</a:t>
+            </a:r>
+          </a:p>
+          <a:p>
+            <a:pPr>
+              <a:spcAft>
+                <a:spcPts val="1400"/>
+              </a:spcAft>
+            </a:pPr>
+            <a:r>
               <a:rPr sz="2400">
                 <a:solidFill>
                   <a:srgbClr val="1F2A37"/>
                 </a:solidFill>
               </a:rPr>
-              <a:t>• The buttons come from the personalities</a:t>
+              <a:t>• One new line in PRESETS</a:t>
             </a:r>
           </a:p>
           <a:p>
@@ -3728,7 +4835,22 @@
                   <a:srgbClr val="1F2A37"/>
                 </a:solidFill>
               </a:rPr>
-              <a:t>• They can never disagree with each other</a:t>
+              <a:t>• A new button appears</a:t>
+            </a:r>
+          </a:p>
+          <a:p>
+            <a:pPr>
+              <a:spcAft>
+                <a:spcPts val="1400"/>
+              </a:spcAft>
+            </a:pPr>
+            <a:r>
+              <a:rPr sz="2400">
+                <a:solidFill>
+                  <a:srgbClr val="1F2A37"/>
+                </a:solidFill>
+              </a:rPr>
+              <a:t>• You wrote no new code</a:t>
             </a:r>
           </a:p>
         </p:txBody>
@@ -3744,6 +4866,14 @@
 <file path=ppt/slides/slide7.xml><?xml version="1.0" encoding="utf-8"?>
 <p:sld xmlns:a="http://schemas.openxmlformats.org/drawingml/2006/main" xmlns:p="http://schemas.openxmlformats.org/presentationml/2006/main" xmlns:r="http://schemas.openxmlformats.org/officeDocument/2006/relationships">
   <p:cSld>
+    <p:bg>
+      <p:bgPr>
+        <a:solidFill>
+          <a:srgbClr val="102127"/>
+        </a:solidFill>
+        <a:effectLst/>
+      </p:bgPr>
+    </p:bg>
     <p:spTree>
       <p:nvGrpSpPr>
         <p:cNvPr id="1" name=""/>
@@ -3753,40 +4883,14 @@
       <p:grpSpPr/>
       <p:sp>
         <p:nvSpPr>
-          <p:cNvPr id="2" name="Title 1"/>
-          <p:cNvSpPr>
-            <a:spLocks noGrp="1"/>
-          </p:cNvSpPr>
-          <p:nvPr>
-            <p:ph type="title"/>
-          </p:nvPr>
-        </p:nvSpPr>
-        <p:spPr/>
-        <p:txBody>
-          <a:bodyPr/>
-          <a:lstStyle/>
-          <a:p>
-            <a:r>
-              <a:rPr sz="3800" b="1">
-                <a:solidFill>
-                  <a:srgbClr val="1F2A37"/>
-                </a:solidFill>
-              </a:rPr>
-              <a:t>Now make it yours</a:t>
-            </a:r>
-          </a:p>
-        </p:txBody>
-      </p:sp>
-      <p:sp>
-        <p:nvSpPr>
-          <p:cNvPr id="3" name="TextBox 2"/>
+          <p:cNvPr id="2" name="TextBox 1"/>
           <p:cNvSpPr txBox="1"/>
           <p:nvPr/>
         </p:nvSpPr>
         <p:spPr>
           <a:xfrm>
-            <a:off x="822960" y="1828800"/>
-            <a:ext cx="10515600" cy="4206240"/>
+            <a:off x="502920" y="274320"/>
+            <a:ext cx="11155680" cy="731520"/>
           </a:xfrm>
           <a:prstGeom prst="rect">
             <a:avLst/>
@@ -3794,53 +4898,1055 @@
           <a:noFill/>
         </p:spPr>
         <p:txBody>
-          <a:bodyPr wrap="square">
+          <a:bodyPr wrap="none">
             <a:spAutoFit/>
           </a:bodyPr>
           <a:lstStyle/>
           <a:p>
-            <a:pPr>
-              <a:spcAft>
-                <a:spcPts val="1400"/>
-              </a:spcAft>
-            </a:pPr>
-            <a:r>
-              <a:rPr sz="2800">
+            <a:r>
+              <a:rPr sz="2600" b="1">
                 <a:solidFill>
                   <a:srgbClr val="01AEFD"/>
                 </a:solidFill>
               </a:rPr>
-              <a:t>Colours, font, name, characters</a:t>
-            </a:r>
-          </a:p>
-          <a:p>
-            <a:pPr>
-              <a:spcAft>
-                <a:spcPts val="1400"/>
-              </a:spcAft>
-            </a:pPr>
-            <a:r>
-              <a:rPr sz="2400">
-                <a:solidFill>
-                  <a:srgbClr val="1F2A37"/>
-                </a:solidFill>
-              </a:rPr>
-              <a:t>• It should look like nobody else's</a:t>
-            </a:r>
-          </a:p>
-          <a:p>
-            <a:pPr>
-              <a:spcAft>
-                <a:spcPts val="1400"/>
-              </a:spcAft>
-            </a:pPr>
-            <a:r>
-              <a:rPr sz="2400">
-                <a:solidFill>
-                  <a:srgbClr val="1F2A37"/>
-                </a:solidFill>
-              </a:rPr>
-              <a:t>• Week 15 is show and tell</a:t>
+              <a:t>Type this into index.html  (1 of 6)</a:t>
+            </a:r>
+          </a:p>
+        </p:txBody>
+      </p:sp>
+      <p:sp>
+        <p:nvSpPr>
+          <p:cNvPr id="3" name="TextBox 2"/>
+          <p:cNvSpPr txBox="1"/>
+          <p:nvPr/>
+        </p:nvSpPr>
+        <p:spPr>
+          <a:xfrm>
+            <a:off x="502920" y="1051560"/>
+            <a:ext cx="11155680" cy="5394960"/>
+          </a:xfrm>
+          <a:prstGeom prst="rect">
+            <a:avLst/>
+          </a:prstGeom>
+          <a:noFill/>
+        </p:spPr>
+        <p:txBody>
+          <a:bodyPr wrap="none">
+            <a:spAutoFit/>
+          </a:bodyPr>
+          <a:lstStyle/>
+          <a:p>
+            <a:pPr>
+              <a:spcAft>
+                <a:spcPts val="0"/>
+              </a:spcAft>
+            </a:pPr>
+            <a:r>
+              <a:rPr sz="1700">
+                <a:solidFill>
+                  <a:srgbClr val="6D8C97"/>
+                </a:solidFill>
+                <a:latin typeface="Consolas"/>
+              </a:rPr>
+              <a:t>   6  </a:t>
+            </a:r>
+            <a:r>
+              <a:rPr sz="1700">
+                <a:solidFill>
+                  <a:srgbClr val="DCECEF"/>
+                </a:solidFill>
+                <a:latin typeface="Consolas"/>
+              </a:rPr>
+              <a:t>  &lt;details class="setup"&gt;</a:t>
+            </a:r>
+          </a:p>
+          <a:p>
+            <a:pPr>
+              <a:spcAft>
+                <a:spcPts val="0"/>
+              </a:spcAft>
+            </a:pPr>
+            <a:r>
+              <a:rPr sz="1700">
+                <a:solidFill>
+                  <a:srgbClr val="6D8C97"/>
+                </a:solidFill>
+                <a:latin typeface="Consolas"/>
+              </a:rPr>
+              <a:t>   7  </a:t>
+            </a:r>
+            <a:r>
+              <a:rPr sz="1700">
+                <a:solidFill>
+                  <a:srgbClr val="DCECEF"/>
+                </a:solidFill>
+                <a:latin typeface="Consolas"/>
+              </a:rPr>
+              <a:t>    &lt;summary&gt;Personality&lt;/summary&gt;</a:t>
+            </a:r>
+          </a:p>
+          <a:p>
+            <a:pPr>
+              <a:spcAft>
+                <a:spcPts val="0"/>
+              </a:spcAft>
+            </a:pPr>
+            <a:r>
+              <a:rPr sz="1700">
+                <a:solidFill>
+                  <a:srgbClr val="6D8C97"/>
+                </a:solidFill>
+                <a:latin typeface="Consolas"/>
+              </a:rPr>
+              <a:t>   8  </a:t>
+            </a:r>
+            <a:r>
+              <a:rPr sz="1700">
+                <a:solidFill>
+                  <a:srgbClr val="7FE0A0"/>
+                </a:solidFill>
+                <a:latin typeface="Consolas"/>
+              </a:rPr>
+              <a:t>    &lt;div id="presets" class="presets"&gt;&lt;/div&gt;</a:t>
+            </a:r>
+          </a:p>
+          <a:p>
+            <a:pPr>
+              <a:spcAft>
+                <a:spcPts val="0"/>
+              </a:spcAft>
+            </a:pPr>
+            <a:r>
+              <a:rPr sz="1700">
+                <a:solidFill>
+                  <a:srgbClr val="6D8C97"/>
+                </a:solidFill>
+                <a:latin typeface="Consolas"/>
+              </a:rPr>
+              <a:t>   9  </a:t>
+            </a:r>
+            <a:r>
+              <a:rPr sz="1700">
+                <a:solidFill>
+                  <a:srgbClr val="DCECEF"/>
+                </a:solidFill>
+                <a:latin typeface="Consolas"/>
+              </a:rPr>
+              <a:t>    &lt;textarea id="persona" rows="3"&gt;You are a friendly, patient helper for a 13-year-old. Keep answers under 60 words. If you are not sure, say so.&lt;/textarea&gt;</a:t>
+            </a:r>
+          </a:p>
+          <a:p>
+            <a:pPr>
+              <a:spcAft>
+                <a:spcPts val="0"/>
+              </a:spcAft>
+            </a:pPr>
+            <a:r>
+              <a:rPr sz="1700">
+                <a:solidFill>
+                  <a:srgbClr val="6D8C97"/>
+                </a:solidFill>
+                <a:latin typeface="Consolas"/>
+              </a:rPr>
+              <a:t>  10  </a:t>
+            </a:r>
+            <a:r>
+              <a:rPr sz="1700">
+                <a:solidFill>
+                  <a:srgbClr val="DCECEF"/>
+                </a:solidFill>
+                <a:latin typeface="Consolas"/>
+              </a:rPr>
+              <a:t>  &lt;/details&gt;</a:t>
+            </a:r>
+          </a:p>
+        </p:txBody>
+      </p:sp>
+    </p:spTree>
+  </p:cSld>
+  <p:clrMapOvr>
+    <a:masterClrMapping/>
+  </p:clrMapOvr>
+</p:sld>
+</file>
+
+<file path=ppt/slides/slide8.xml><?xml version="1.0" encoding="utf-8"?>
+<p:sld xmlns:a="http://schemas.openxmlformats.org/drawingml/2006/main" xmlns:p="http://schemas.openxmlformats.org/presentationml/2006/main" xmlns:r="http://schemas.openxmlformats.org/officeDocument/2006/relationships">
+  <p:cSld>
+    <p:bg>
+      <p:bgPr>
+        <a:solidFill>
+          <a:srgbClr val="102127"/>
+        </a:solidFill>
+        <a:effectLst/>
+      </p:bgPr>
+    </p:bg>
+    <p:spTree>
+      <p:nvGrpSpPr>
+        <p:cNvPr id="1" name=""/>
+        <p:cNvGrpSpPr/>
+        <p:nvPr/>
+      </p:nvGrpSpPr>
+      <p:grpSpPr/>
+      <p:sp>
+        <p:nvSpPr>
+          <p:cNvPr id="2" name="TextBox 1"/>
+          <p:cNvSpPr txBox="1"/>
+          <p:nvPr/>
+        </p:nvSpPr>
+        <p:spPr>
+          <a:xfrm>
+            <a:off x="502920" y="274320"/>
+            <a:ext cx="11155680" cy="731520"/>
+          </a:xfrm>
+          <a:prstGeom prst="rect">
+            <a:avLst/>
+          </a:prstGeom>
+          <a:noFill/>
+        </p:spPr>
+        <p:txBody>
+          <a:bodyPr wrap="none">
+            <a:spAutoFit/>
+          </a:bodyPr>
+          <a:lstStyle/>
+          <a:p>
+            <a:r>
+              <a:rPr sz="2600" b="1">
+                <a:solidFill>
+                  <a:srgbClr val="01AEFD"/>
+                </a:solidFill>
+              </a:rPr>
+              <a:t>Type this into script.js  (2 of 6)</a:t>
+            </a:r>
+          </a:p>
+        </p:txBody>
+      </p:sp>
+      <p:sp>
+        <p:nvSpPr>
+          <p:cNvPr id="3" name="TextBox 2"/>
+          <p:cNvSpPr txBox="1"/>
+          <p:nvPr/>
+        </p:nvSpPr>
+        <p:spPr>
+          <a:xfrm>
+            <a:off x="502920" y="1051560"/>
+            <a:ext cx="11155680" cy="5394960"/>
+          </a:xfrm>
+          <a:prstGeom prst="rect">
+            <a:avLst/>
+          </a:prstGeom>
+          <a:noFill/>
+        </p:spPr>
+        <p:txBody>
+          <a:bodyPr wrap="none">
+            <a:spAutoFit/>
+          </a:bodyPr>
+          <a:lstStyle/>
+          <a:p>
+            <a:pPr>
+              <a:spcAft>
+                <a:spcPts val="0"/>
+              </a:spcAft>
+            </a:pPr>
+            <a:r>
+              <a:rPr sz="1400">
+                <a:solidFill>
+                  <a:srgbClr val="6D8C97"/>
+                </a:solidFill>
+                <a:latin typeface="Consolas"/>
+              </a:rPr>
+              <a:t>   8  </a:t>
+            </a:r>
+            <a:r>
+              <a:rPr sz="1400">
+                <a:solidFill>
+                  <a:srgbClr val="DCECEF"/>
+                </a:solidFill>
+                <a:latin typeface="Consolas"/>
+              </a:rPr>
+              <a:t> </a:t>
+            </a:r>
+          </a:p>
+          <a:p>
+            <a:pPr>
+              <a:spcAft>
+                <a:spcPts val="0"/>
+              </a:spcAft>
+            </a:pPr>
+            <a:r>
+              <a:rPr sz="1400">
+                <a:solidFill>
+                  <a:srgbClr val="6D8C97"/>
+                </a:solidFill>
+                <a:latin typeface="Consolas"/>
+              </a:rPr>
+              <a:t>   9  </a:t>
+            </a:r>
+            <a:r>
+              <a:rPr sz="1400">
+                <a:solidFill>
+                  <a:srgbClr val="DCECEF"/>
+                </a:solidFill>
+                <a:latin typeface="Consolas"/>
+              </a:rPr>
+              <a:t>// Week 2: find the boxes we named in index.html.</a:t>
+            </a:r>
+          </a:p>
+          <a:p>
+            <a:pPr>
+              <a:spcAft>
+                <a:spcPts val="0"/>
+              </a:spcAft>
+            </a:pPr>
+            <a:r>
+              <a:rPr sz="1400">
+                <a:solidFill>
+                  <a:srgbClr val="6D8C97"/>
+                </a:solidFill>
+                <a:latin typeface="Consolas"/>
+              </a:rPr>
+              <a:t>  10  </a:t>
+            </a:r>
+            <a:r>
+              <a:rPr sz="1400">
+                <a:solidFill>
+                  <a:srgbClr val="DCECEF"/>
+                </a:solidFill>
+                <a:latin typeface="Consolas"/>
+              </a:rPr>
+              <a:t>// document.getElementById looks for the id= we wrote on each element.</a:t>
+            </a:r>
+          </a:p>
+          <a:p>
+            <a:pPr>
+              <a:spcAft>
+                <a:spcPts val="0"/>
+              </a:spcAft>
+            </a:pPr>
+            <a:r>
+              <a:rPr sz="1400">
+                <a:solidFill>
+                  <a:srgbClr val="6D8C97"/>
+                </a:solidFill>
+                <a:latin typeface="Consolas"/>
+              </a:rPr>
+              <a:t>  11  </a:t>
+            </a:r>
+            <a:r>
+              <a:rPr sz="1400">
+                <a:solidFill>
+                  <a:srgbClr val="DCECEF"/>
+                </a:solidFill>
+                <a:latin typeface="Consolas"/>
+              </a:rPr>
+              <a:t>const chat = document.getElementById('chat');</a:t>
+            </a:r>
+          </a:p>
+          <a:p>
+            <a:pPr>
+              <a:spcAft>
+                <a:spcPts val="0"/>
+              </a:spcAft>
+            </a:pPr>
+            <a:r>
+              <a:rPr sz="1400">
+                <a:solidFill>
+                  <a:srgbClr val="6D8C97"/>
+                </a:solidFill>
+                <a:latin typeface="Consolas"/>
+              </a:rPr>
+              <a:t>  12  </a:t>
+            </a:r>
+            <a:r>
+              <a:rPr sz="1400">
+                <a:solidFill>
+                  <a:srgbClr val="DCECEF"/>
+                </a:solidFill>
+                <a:latin typeface="Consolas"/>
+              </a:rPr>
+              <a:t>const composer = document.getElementById('composer');</a:t>
+            </a:r>
+          </a:p>
+          <a:p>
+            <a:pPr>
+              <a:spcAft>
+                <a:spcPts val="0"/>
+              </a:spcAft>
+            </a:pPr>
+            <a:r>
+              <a:rPr sz="1400">
+                <a:solidFill>
+                  <a:srgbClr val="6D8C97"/>
+                </a:solidFill>
+                <a:latin typeface="Consolas"/>
+              </a:rPr>
+              <a:t>  13  </a:t>
+            </a:r>
+            <a:r>
+              <a:rPr sz="1400">
+                <a:solidFill>
+                  <a:srgbClr val="DCECEF"/>
+                </a:solidFill>
+                <a:latin typeface="Consolas"/>
+              </a:rPr>
+              <a:t>const promptBox = document.getElementById('prompt');</a:t>
+            </a:r>
+          </a:p>
+          <a:p>
+            <a:pPr>
+              <a:spcAft>
+                <a:spcPts val="0"/>
+              </a:spcAft>
+            </a:pPr>
+            <a:r>
+              <a:rPr sz="1400">
+                <a:solidFill>
+                  <a:srgbClr val="6D8C97"/>
+                </a:solidFill>
+                <a:latin typeface="Consolas"/>
+              </a:rPr>
+              <a:t>  14  </a:t>
+            </a:r>
+            <a:r>
+              <a:rPr sz="1400">
+                <a:solidFill>
+                  <a:srgbClr val="DCECEF"/>
+                </a:solidFill>
+                <a:latin typeface="Consolas"/>
+              </a:rPr>
+              <a:t>const personaBox = document.getElementById('persona');</a:t>
+            </a:r>
+          </a:p>
+          <a:p>
+            <a:pPr>
+              <a:spcAft>
+                <a:spcPts val="0"/>
+              </a:spcAft>
+            </a:pPr>
+            <a:r>
+              <a:rPr sz="1400">
+                <a:solidFill>
+                  <a:srgbClr val="6D8C97"/>
+                </a:solidFill>
+                <a:latin typeface="Consolas"/>
+              </a:rPr>
+              <a:t>  15  </a:t>
+            </a:r>
+            <a:r>
+              <a:rPr sz="1400">
+                <a:solidFill>
+                  <a:srgbClr val="7FE0A0"/>
+                </a:solidFill>
+                <a:latin typeface="Consolas"/>
+              </a:rPr>
+              <a:t>const presetBox = document.getElementById('presets');</a:t>
+            </a:r>
+          </a:p>
+          <a:p>
+            <a:pPr>
+              <a:spcAft>
+                <a:spcPts val="0"/>
+              </a:spcAft>
+            </a:pPr>
+            <a:r>
+              <a:rPr sz="1400">
+                <a:solidFill>
+                  <a:srgbClr val="6D8C97"/>
+                </a:solidFill>
+                <a:latin typeface="Consolas"/>
+              </a:rPr>
+              <a:t>  16  </a:t>
+            </a:r>
+            <a:r>
+              <a:rPr sz="1400">
+                <a:solidFill>
+                  <a:srgbClr val="DCECEF"/>
+                </a:solidFill>
+                <a:latin typeface="Consolas"/>
+              </a:rPr>
+              <a:t>const modelBox = document.getElementById('model');</a:t>
+            </a:r>
+          </a:p>
+          <a:p>
+            <a:pPr>
+              <a:spcAft>
+                <a:spcPts val="0"/>
+              </a:spcAft>
+            </a:pPr>
+            <a:r>
+              <a:rPr sz="1400">
+                <a:solidFill>
+                  <a:srgbClr val="6D8C97"/>
+                </a:solidFill>
+                <a:latin typeface="Consolas"/>
+              </a:rPr>
+              <a:t>  17  </a:t>
+            </a:r>
+            <a:r>
+              <a:rPr sz="1400">
+                <a:solidFill>
+                  <a:srgbClr val="DCECEF"/>
+                </a:solidFill>
+                <a:latin typeface="Consolas"/>
+              </a:rPr>
+              <a:t>const tempBox = document.getElementById('temp');</a:t>
+            </a:r>
+          </a:p>
+          <a:p>
+            <a:pPr>
+              <a:spcAft>
+                <a:spcPts val="0"/>
+              </a:spcAft>
+            </a:pPr>
+            <a:r>
+              <a:rPr sz="1400">
+                <a:solidFill>
+                  <a:srgbClr val="6D8C97"/>
+                </a:solidFill>
+                <a:latin typeface="Consolas"/>
+              </a:rPr>
+              <a:t>  18  </a:t>
+            </a:r>
+            <a:r>
+              <a:rPr sz="1400">
+                <a:solidFill>
+                  <a:srgbClr val="DCECEF"/>
+                </a:solidFill>
+                <a:latin typeface="Consolas"/>
+              </a:rPr>
+              <a:t>const tempOut = document.getElementById('tempOut');</a:t>
+            </a:r>
+          </a:p>
+          <a:p>
+            <a:pPr>
+              <a:spcAft>
+                <a:spcPts val="0"/>
+              </a:spcAft>
+            </a:pPr>
+            <a:r>
+              <a:rPr sz="1400">
+                <a:solidFill>
+                  <a:srgbClr val="6D8C97"/>
+                </a:solidFill>
+                <a:latin typeface="Consolas"/>
+              </a:rPr>
+              <a:t>  19  </a:t>
+            </a:r>
+            <a:r>
+              <a:rPr sz="1400">
+                <a:solidFill>
+                  <a:srgbClr val="DCECEF"/>
+                </a:solidFill>
+                <a:latin typeface="Consolas"/>
+              </a:rPr>
+              <a:t>const transcriptBox = document.getElementById('transcript');</a:t>
+            </a:r>
+          </a:p>
+          <a:p>
+            <a:pPr>
+              <a:spcAft>
+                <a:spcPts val="0"/>
+              </a:spcAft>
+            </a:pPr>
+            <a:r>
+              <a:rPr sz="1400">
+                <a:solidFill>
+                  <a:srgbClr val="6D8C97"/>
+                </a:solidFill>
+                <a:latin typeface="Consolas"/>
+              </a:rPr>
+              <a:t>  20  </a:t>
+            </a:r>
+            <a:r>
+              <a:rPr sz="1400">
+                <a:solidFill>
+                  <a:srgbClr val="DCECEF"/>
+                </a:solidFill>
+                <a:latin typeface="Consolas"/>
+              </a:rPr>
+              <a:t>const saveButton = document.getElementById('save');</a:t>
+            </a:r>
+          </a:p>
+          <a:p>
+            <a:pPr>
+              <a:spcAft>
+                <a:spcPts val="0"/>
+              </a:spcAft>
+            </a:pPr>
+            <a:r>
+              <a:rPr sz="1400">
+                <a:solidFill>
+                  <a:srgbClr val="6D8C97"/>
+                </a:solidFill>
+                <a:latin typeface="Consolas"/>
+              </a:rPr>
+              <a:t>  21  </a:t>
+            </a:r>
+            <a:r>
+              <a:rPr sz="1400">
+                <a:solidFill>
+                  <a:srgbClr val="DCECEF"/>
+                </a:solidFill>
+                <a:latin typeface="Consolas"/>
+              </a:rPr>
+              <a:t>const loadButton = document.getElementById('load');</a:t>
+            </a:r>
+          </a:p>
+        </p:txBody>
+      </p:sp>
+    </p:spTree>
+  </p:cSld>
+  <p:clrMapOvr>
+    <a:masterClrMapping/>
+  </p:clrMapOvr>
+</p:sld>
+</file>
+
+<file path=ppt/slides/slide9.xml><?xml version="1.0" encoding="utf-8"?>
+<p:sld xmlns:a="http://schemas.openxmlformats.org/drawingml/2006/main" xmlns:p="http://schemas.openxmlformats.org/presentationml/2006/main" xmlns:r="http://schemas.openxmlformats.org/officeDocument/2006/relationships">
+  <p:cSld>
+    <p:bg>
+      <p:bgPr>
+        <a:solidFill>
+          <a:srgbClr val="102127"/>
+        </a:solidFill>
+        <a:effectLst/>
+      </p:bgPr>
+    </p:bg>
+    <p:spTree>
+      <p:nvGrpSpPr>
+        <p:cNvPr id="1" name=""/>
+        <p:cNvGrpSpPr/>
+        <p:nvPr/>
+      </p:nvGrpSpPr>
+      <p:grpSpPr/>
+      <p:sp>
+        <p:nvSpPr>
+          <p:cNvPr id="2" name="TextBox 1"/>
+          <p:cNvSpPr txBox="1"/>
+          <p:nvPr/>
+        </p:nvSpPr>
+        <p:spPr>
+          <a:xfrm>
+            <a:off x="502920" y="274320"/>
+            <a:ext cx="11155680" cy="731520"/>
+          </a:xfrm>
+          <a:prstGeom prst="rect">
+            <a:avLst/>
+          </a:prstGeom>
+          <a:noFill/>
+        </p:spPr>
+        <p:txBody>
+          <a:bodyPr wrap="none">
+            <a:spAutoFit/>
+          </a:bodyPr>
+          <a:lstStyle/>
+          <a:p>
+            <a:r>
+              <a:rPr sz="2600" b="1">
+                <a:solidFill>
+                  <a:srgbClr val="01AEFD"/>
+                </a:solidFill>
+              </a:rPr>
+              <a:t>Type this into script.js  (3 of 6)</a:t>
+            </a:r>
+          </a:p>
+        </p:txBody>
+      </p:sp>
+      <p:sp>
+        <p:nvSpPr>
+          <p:cNvPr id="3" name="TextBox 2"/>
+          <p:cNvSpPr txBox="1"/>
+          <p:nvPr/>
+        </p:nvSpPr>
+        <p:spPr>
+          <a:xfrm>
+            <a:off x="502920" y="1051560"/>
+            <a:ext cx="11155680" cy="5394960"/>
+          </a:xfrm>
+          <a:prstGeom prst="rect">
+            <a:avLst/>
+          </a:prstGeom>
+          <a:noFill/>
+        </p:spPr>
+        <p:txBody>
+          <a:bodyPr wrap="none">
+            <a:spAutoFit/>
+          </a:bodyPr>
+          <a:lstStyle/>
+          <a:p>
+            <a:pPr>
+              <a:spcAft>
+                <a:spcPts val="0"/>
+              </a:spcAft>
+            </a:pPr>
+            <a:r>
+              <a:rPr sz="1400">
+                <a:solidFill>
+                  <a:srgbClr val="6D8C97"/>
+                </a:solidFill>
+                <a:latin typeface="Consolas"/>
+              </a:rPr>
+              <a:t> 151  </a:t>
+            </a:r>
+            <a:r>
+              <a:rPr sz="1400">
+                <a:solidFill>
+                  <a:srgbClr val="DCECEF"/>
+                </a:solidFill>
+                <a:latin typeface="Consolas"/>
+              </a:rPr>
+              <a:t> </a:t>
+            </a:r>
+          </a:p>
+          <a:p>
+            <a:pPr>
+              <a:spcAft>
+                <a:spcPts val="0"/>
+              </a:spcAft>
+            </a:pPr>
+            <a:r>
+              <a:rPr sz="1400">
+                <a:solidFill>
+                  <a:srgbClr val="6D8C97"/>
+                </a:solidFill>
+                <a:latin typeface="Consolas"/>
+              </a:rPr>
+              <a:t> 152  </a:t>
+            </a:r>
+            <a:r>
+              <a:rPr sz="1400">
+                <a:solidFill>
+                  <a:srgbClr val="DCECEF"/>
+                </a:solidFill>
+                <a:latin typeface="Consolas"/>
+              </a:rPr>
+              <a:t>// Week 9: show the slider's value so the number means something.</a:t>
+            </a:r>
+          </a:p>
+          <a:p>
+            <a:pPr>
+              <a:spcAft>
+                <a:spcPts val="0"/>
+              </a:spcAft>
+            </a:pPr>
+            <a:r>
+              <a:rPr sz="1400">
+                <a:solidFill>
+                  <a:srgbClr val="6D8C97"/>
+                </a:solidFill>
+                <a:latin typeface="Consolas"/>
+              </a:rPr>
+              <a:t> 153  </a:t>
+            </a:r>
+            <a:r>
+              <a:rPr sz="1400">
+                <a:solidFill>
+                  <a:srgbClr val="DCECEF"/>
+                </a:solidFill>
+                <a:latin typeface="Consolas"/>
+              </a:rPr>
+              <a:t>tempBox.addEventListener('input', function () {</a:t>
+            </a:r>
+          </a:p>
+          <a:p>
+            <a:pPr>
+              <a:spcAft>
+                <a:spcPts val="0"/>
+              </a:spcAft>
+            </a:pPr>
+            <a:r>
+              <a:rPr sz="1400">
+                <a:solidFill>
+                  <a:srgbClr val="6D8C97"/>
+                </a:solidFill>
+                <a:latin typeface="Consolas"/>
+              </a:rPr>
+              <a:t> 154  </a:t>
+            </a:r>
+            <a:r>
+              <a:rPr sz="1400">
+                <a:solidFill>
+                  <a:srgbClr val="DCECEF"/>
+                </a:solidFill>
+                <a:latin typeface="Consolas"/>
+              </a:rPr>
+              <a:t>  tempOut.textContent = tempBox.value;</a:t>
+            </a:r>
+          </a:p>
+          <a:p>
+            <a:pPr>
+              <a:spcAft>
+                <a:spcPts val="0"/>
+              </a:spcAft>
+            </a:pPr>
+            <a:r>
+              <a:rPr sz="1400">
+                <a:solidFill>
+                  <a:srgbClr val="6D8C97"/>
+                </a:solidFill>
+                <a:latin typeface="Consolas"/>
+              </a:rPr>
+              <a:t> 155  </a:t>
+            </a:r>
+            <a:r>
+              <a:rPr sz="1400">
+                <a:solidFill>
+                  <a:srgbClr val="DCECEF"/>
+                </a:solidFill>
+                <a:latin typeface="Consolas"/>
+              </a:rPr>
+              <a:t>});</a:t>
+            </a:r>
+          </a:p>
+          <a:p>
+            <a:pPr>
+              <a:spcAft>
+                <a:spcPts val="0"/>
+              </a:spcAft>
+            </a:pPr>
+            <a:r>
+              <a:rPr sz="1400">
+                <a:solidFill>
+                  <a:srgbClr val="6D8C97"/>
+                </a:solidFill>
+                <a:latin typeface="Consolas"/>
+              </a:rPr>
+              <a:t> 156  </a:t>
+            </a:r>
+            <a:r>
+              <a:rPr sz="1400">
+                <a:solidFill>
+                  <a:srgbClr val="DCECEF"/>
+                </a:solidFill>
+                <a:latin typeface="Consolas"/>
+              </a:rPr>
+              <a:t> </a:t>
+            </a:r>
+          </a:p>
+          <a:p>
+            <a:pPr>
+              <a:spcAft>
+                <a:spcPts val="0"/>
+              </a:spcAft>
+            </a:pPr>
+            <a:r>
+              <a:rPr sz="1400">
+                <a:solidFill>
+                  <a:srgbClr val="6D8C97"/>
+                </a:solidFill>
+                <a:latin typeface="Consolas"/>
+              </a:rPr>
+              <a:t> 157  </a:t>
+            </a:r>
+            <a:r>
+              <a:rPr sz="1400">
+                <a:solidFill>
+                  <a:srgbClr val="7FE0A0"/>
+                </a:solidFill>
+                <a:latin typeface="Consolas"/>
+              </a:rPr>
+              <a:t>// Week 13: build one button per character. Object.keys gives the names.</a:t>
+            </a:r>
+          </a:p>
+          <a:p>
+            <a:pPr>
+              <a:spcAft>
+                <a:spcPts val="0"/>
+              </a:spcAft>
+            </a:pPr>
+            <a:r>
+              <a:rPr sz="1400">
+                <a:solidFill>
+                  <a:srgbClr val="6D8C97"/>
+                </a:solidFill>
+                <a:latin typeface="Consolas"/>
+              </a:rPr>
+              <a:t> 158  </a:t>
+            </a:r>
+            <a:r>
+              <a:rPr sz="1400">
+                <a:solidFill>
+                  <a:srgbClr val="7FE0A0"/>
+                </a:solidFill>
+                <a:latin typeface="Consolas"/>
+              </a:rPr>
+              <a:t>for (const name of Object.keys(PRESETS)) {</a:t>
+            </a:r>
+          </a:p>
+          <a:p>
+            <a:pPr>
+              <a:spcAft>
+                <a:spcPts val="0"/>
+              </a:spcAft>
+            </a:pPr>
+            <a:r>
+              <a:rPr sz="1400">
+                <a:solidFill>
+                  <a:srgbClr val="6D8C97"/>
+                </a:solidFill>
+                <a:latin typeface="Consolas"/>
+              </a:rPr>
+              <a:t> 159  </a:t>
+            </a:r>
+            <a:r>
+              <a:rPr sz="1400">
+                <a:solidFill>
+                  <a:srgbClr val="7FE0A0"/>
+                </a:solidFill>
+                <a:latin typeface="Consolas"/>
+              </a:rPr>
+              <a:t>  const button = document.createElement('button');</a:t>
+            </a:r>
+          </a:p>
+          <a:p>
+            <a:pPr>
+              <a:spcAft>
+                <a:spcPts val="0"/>
+              </a:spcAft>
+            </a:pPr>
+            <a:r>
+              <a:rPr sz="1400">
+                <a:solidFill>
+                  <a:srgbClr val="6D8C97"/>
+                </a:solidFill>
+                <a:latin typeface="Consolas"/>
+              </a:rPr>
+              <a:t> 160  </a:t>
+            </a:r>
+            <a:r>
+              <a:rPr sz="1400">
+                <a:solidFill>
+                  <a:srgbClr val="7FE0A0"/>
+                </a:solidFill>
+                <a:latin typeface="Consolas"/>
+              </a:rPr>
+              <a:t>  button.type = 'button';</a:t>
+            </a:r>
+          </a:p>
+          <a:p>
+            <a:pPr>
+              <a:spcAft>
+                <a:spcPts val="0"/>
+              </a:spcAft>
+            </a:pPr>
+            <a:r>
+              <a:rPr sz="1400">
+                <a:solidFill>
+                  <a:srgbClr val="6D8C97"/>
+                </a:solidFill>
+                <a:latin typeface="Consolas"/>
+              </a:rPr>
+              <a:t> 161  </a:t>
+            </a:r>
+            <a:r>
+              <a:rPr sz="1400">
+                <a:solidFill>
+                  <a:srgbClr val="7FE0A0"/>
+                </a:solidFill>
+                <a:latin typeface="Consolas"/>
+              </a:rPr>
+              <a:t>  button.className = 'preset';</a:t>
+            </a:r>
+          </a:p>
+          <a:p>
+            <a:pPr>
+              <a:spcAft>
+                <a:spcPts val="0"/>
+              </a:spcAft>
+            </a:pPr>
+            <a:r>
+              <a:rPr sz="1400">
+                <a:solidFill>
+                  <a:srgbClr val="6D8C97"/>
+                </a:solidFill>
+                <a:latin typeface="Consolas"/>
+              </a:rPr>
+              <a:t> 162  </a:t>
+            </a:r>
+            <a:r>
+              <a:rPr sz="1400">
+                <a:solidFill>
+                  <a:srgbClr val="7FE0A0"/>
+                </a:solidFill>
+                <a:latin typeface="Consolas"/>
+              </a:rPr>
+              <a:t>  button.textContent = name;</a:t>
+            </a:r>
+          </a:p>
+          <a:p>
+            <a:pPr>
+              <a:spcAft>
+                <a:spcPts val="0"/>
+              </a:spcAft>
+            </a:pPr>
+            <a:r>
+              <a:rPr sz="1400">
+                <a:solidFill>
+                  <a:srgbClr val="6D8C97"/>
+                </a:solidFill>
+                <a:latin typeface="Consolas"/>
+              </a:rPr>
+              <a:t> 163  </a:t>
+            </a:r>
+            <a:r>
+              <a:rPr sz="1400">
+                <a:solidFill>
+                  <a:srgbClr val="7FE0A0"/>
+                </a:solidFill>
+                <a:latin typeface="Consolas"/>
+              </a:rPr>
+              <a:t>  button.addEventListener('click', function () {</a:t>
+            </a:r>
+          </a:p>
+          <a:p>
+            <a:pPr>
+              <a:spcAft>
+                <a:spcPts val="0"/>
+              </a:spcAft>
+            </a:pPr>
+            <a:r>
+              <a:rPr sz="1400">
+                <a:solidFill>
+                  <a:srgbClr val="6D8C97"/>
+                </a:solidFill>
+                <a:latin typeface="Consolas"/>
+              </a:rPr>
+              <a:t> 164  </a:t>
+            </a:r>
+            <a:r>
+              <a:rPr sz="1400">
+                <a:solidFill>
+                  <a:srgbClr val="7FE0A0"/>
+                </a:solidFill>
+                <a:latin typeface="Consolas"/>
+              </a:rPr>
+              <a:t>    personaBox.value = PRESETS[name];</a:t>
+            </a:r>
+          </a:p>
+          <a:p>
+            <a:pPr>
+              <a:spcAft>
+                <a:spcPts val="0"/>
+              </a:spcAft>
+            </a:pPr>
+            <a:r>
+              <a:rPr sz="1400">
+                <a:solidFill>
+                  <a:srgbClr val="6D8C97"/>
+                </a:solidFill>
+                <a:latin typeface="Consolas"/>
+              </a:rPr>
+              <a:t> 165  </a:t>
+            </a:r>
+            <a:r>
+              <a:rPr sz="1400">
+                <a:solidFill>
+                  <a:srgbClr val="7FE0A0"/>
+                </a:solidFill>
+                <a:latin typeface="Consolas"/>
+              </a:rPr>
+              <a:t>  });</a:t>
             </a:r>
           </a:p>
         </p:txBody>

--- a/ai101/slides/week-13.pptx
+++ b/ai101/slides/week-13.pptx
@@ -3258,7 +3258,7 @@
                 </a:solidFill>
                 <a:latin typeface="Consolas"/>
               </a:rPr>
-              <a:t> 166  </a:t>
+              <a:t> 169  </a:t>
             </a:r>
             <a:r>
               <a:rPr sz="1700">
@@ -3283,7 +3283,7 @@
                 </a:solidFill>
                 <a:latin typeface="Consolas"/>
               </a:rPr>
-              <a:t> 167  </a:t>
+              <a:t> 170  </a:t>
             </a:r>
             <a:r>
               <a:rPr sz="1700">
@@ -4514,7 +4514,7 @@
                 </a:solidFill>
                 <a:latin typeface="Consolas"/>
               </a:rPr>
-              <a:t>  26  </a:t>
+              <a:t>  29  </a:t>
             </a:r>
             <a:r>
               <a:rPr sz="1700">
@@ -4539,7 +4539,7 @@
                 </a:solidFill>
                 <a:latin typeface="Consolas"/>
               </a:rPr>
-              <a:t>  27  </a:t>
+              <a:t>  30  </a:t>
             </a:r>
             <a:r>
               <a:rPr sz="1700">
@@ -4564,7 +4564,7 @@
                 </a:solidFill>
                 <a:latin typeface="Consolas"/>
               </a:rPr>
-              <a:t>  28  </a:t>
+              <a:t>  31  </a:t>
             </a:r>
             <a:r>
               <a:rPr sz="1700">
@@ -4589,7 +4589,7 @@
                 </a:solidFill>
                 <a:latin typeface="Consolas"/>
               </a:rPr>
-              <a:t>  29  </a:t>
+              <a:t>  32  </a:t>
             </a:r>
             <a:r>
               <a:rPr sz="1700">
@@ -4614,7 +4614,7 @@
                 </a:solidFill>
                 <a:latin typeface="Consolas"/>
               </a:rPr>
-              <a:t>  30  </a:t>
+              <a:t>  33  </a:t>
             </a:r>
             <a:r>
               <a:rPr sz="1700">
@@ -4639,7 +4639,7 @@
                 </a:solidFill>
                 <a:latin typeface="Consolas"/>
               </a:rPr>
-              <a:t>  31  </a:t>
+              <a:t>  34  </a:t>
             </a:r>
             <a:r>
               <a:rPr sz="1700">
@@ -4664,7 +4664,7 @@
                 </a:solidFill>
                 <a:latin typeface="Consolas"/>
               </a:rPr>
-              <a:t>  32  </a:t>
+              <a:t>  35  </a:t>
             </a:r>
             <a:r>
               <a:rPr sz="1700">
@@ -4689,7 +4689,7 @@
                 </a:solidFill>
                 <a:latin typeface="Consolas"/>
               </a:rPr>
-              <a:t>  33  </a:t>
+              <a:t>  36  </a:t>
             </a:r>
             <a:r>
               <a:rPr sz="1700">
@@ -4714,7 +4714,7 @@
                 </a:solidFill>
                 <a:latin typeface="Consolas"/>
               </a:rPr>
-              <a:t>  34  </a:t>
+              <a:t>  37  </a:t>
             </a:r>
             <a:r>
               <a:rPr sz="1700">
@@ -4948,7 +4948,7 @@
                 </a:solidFill>
                 <a:latin typeface="Consolas"/>
               </a:rPr>
-              <a:t>   6  </a:t>
+              <a:t>   8  </a:t>
             </a:r>
             <a:r>
               <a:rPr sz="1700">
@@ -4973,7 +4973,7 @@
                 </a:solidFill>
                 <a:latin typeface="Consolas"/>
               </a:rPr>
-              <a:t>   7  </a:t>
+              <a:t>   9  </a:t>
             </a:r>
             <a:r>
               <a:rPr sz="1700">
@@ -4998,7 +4998,7 @@
                 </a:solidFill>
                 <a:latin typeface="Consolas"/>
               </a:rPr>
-              <a:t>   8  </a:t>
+              <a:t>  10  </a:t>
             </a:r>
             <a:r>
               <a:rPr sz="1700">
@@ -5023,7 +5023,7 @@
                 </a:solidFill>
                 <a:latin typeface="Consolas"/>
               </a:rPr>
-              <a:t>   9  </a:t>
+              <a:t>  11  </a:t>
             </a:r>
             <a:r>
               <a:rPr sz="1700">
@@ -5048,7 +5048,7 @@
                 </a:solidFill>
                 <a:latin typeface="Consolas"/>
               </a:rPr>
-              <a:t>  10  </a:t>
+              <a:t>  12  </a:t>
             </a:r>
             <a:r>
               <a:rPr sz="1700">
@@ -5155,7 +5155,7 @@
                 </a:solidFill>
                 <a:latin typeface="Consolas"/>
               </a:rPr>
-              <a:t>   8  </a:t>
+              <a:t>  11  </a:t>
             </a:r>
             <a:r>
               <a:rPr sz="1400">
@@ -5180,7 +5180,7 @@
                 </a:solidFill>
                 <a:latin typeface="Consolas"/>
               </a:rPr>
-              <a:t>   9  </a:t>
+              <a:t>  12  </a:t>
             </a:r>
             <a:r>
               <a:rPr sz="1400">
@@ -5205,7 +5205,7 @@
                 </a:solidFill>
                 <a:latin typeface="Consolas"/>
               </a:rPr>
-              <a:t>  10  </a:t>
+              <a:t>  13  </a:t>
             </a:r>
             <a:r>
               <a:rPr sz="1400">
@@ -5230,7 +5230,7 @@
                 </a:solidFill>
                 <a:latin typeface="Consolas"/>
               </a:rPr>
-              <a:t>  11  </a:t>
+              <a:t>  14  </a:t>
             </a:r>
             <a:r>
               <a:rPr sz="1400">
@@ -5255,7 +5255,7 @@
                 </a:solidFill>
                 <a:latin typeface="Consolas"/>
               </a:rPr>
-              <a:t>  12  </a:t>
+              <a:t>  15  </a:t>
             </a:r>
             <a:r>
               <a:rPr sz="1400">
@@ -5280,7 +5280,7 @@
                 </a:solidFill>
                 <a:latin typeface="Consolas"/>
               </a:rPr>
-              <a:t>  13  </a:t>
+              <a:t>  16  </a:t>
             </a:r>
             <a:r>
               <a:rPr sz="1400">
@@ -5305,7 +5305,7 @@
                 </a:solidFill>
                 <a:latin typeface="Consolas"/>
               </a:rPr>
-              <a:t>  14  </a:t>
+              <a:t>  17  </a:t>
             </a:r>
             <a:r>
               <a:rPr sz="1400">
@@ -5330,7 +5330,7 @@
                 </a:solidFill>
                 <a:latin typeface="Consolas"/>
               </a:rPr>
-              <a:t>  15  </a:t>
+              <a:t>  18  </a:t>
             </a:r>
             <a:r>
               <a:rPr sz="1400">
@@ -5355,7 +5355,7 @@
                 </a:solidFill>
                 <a:latin typeface="Consolas"/>
               </a:rPr>
-              <a:t>  16  </a:t>
+              <a:t>  19  </a:t>
             </a:r>
             <a:r>
               <a:rPr sz="1400">
@@ -5380,7 +5380,7 @@
                 </a:solidFill>
                 <a:latin typeface="Consolas"/>
               </a:rPr>
-              <a:t>  17  </a:t>
+              <a:t>  20  </a:t>
             </a:r>
             <a:r>
               <a:rPr sz="1400">
@@ -5405,7 +5405,7 @@
                 </a:solidFill>
                 <a:latin typeface="Consolas"/>
               </a:rPr>
-              <a:t>  18  </a:t>
+              <a:t>  21  </a:t>
             </a:r>
             <a:r>
               <a:rPr sz="1400">
@@ -5430,7 +5430,7 @@
                 </a:solidFill>
                 <a:latin typeface="Consolas"/>
               </a:rPr>
-              <a:t>  19  </a:t>
+              <a:t>  22  </a:t>
             </a:r>
             <a:r>
               <a:rPr sz="1400">
@@ -5455,7 +5455,7 @@
                 </a:solidFill>
                 <a:latin typeface="Consolas"/>
               </a:rPr>
-              <a:t>  20  </a:t>
+              <a:t>  23  </a:t>
             </a:r>
             <a:r>
               <a:rPr sz="1400">
@@ -5480,7 +5480,7 @@
                 </a:solidFill>
                 <a:latin typeface="Consolas"/>
               </a:rPr>
-              <a:t>  21  </a:t>
+              <a:t>  24  </a:t>
             </a:r>
             <a:r>
               <a:rPr sz="1400">
@@ -5587,7 +5587,7 @@
                 </a:solidFill>
                 <a:latin typeface="Consolas"/>
               </a:rPr>
-              <a:t> 151  </a:t>
+              <a:t> 154  </a:t>
             </a:r>
             <a:r>
               <a:rPr sz="1400">
@@ -5612,7 +5612,7 @@
                 </a:solidFill>
                 <a:latin typeface="Consolas"/>
               </a:rPr>
-              <a:t> 152  </a:t>
+              <a:t> 155  </a:t>
             </a:r>
             <a:r>
               <a:rPr sz="1400">
@@ -5637,7 +5637,7 @@
                 </a:solidFill>
                 <a:latin typeface="Consolas"/>
               </a:rPr>
-              <a:t> 153  </a:t>
+              <a:t> 156  </a:t>
             </a:r>
             <a:r>
               <a:rPr sz="1400">
@@ -5662,7 +5662,7 @@
                 </a:solidFill>
                 <a:latin typeface="Consolas"/>
               </a:rPr>
-              <a:t> 154  </a:t>
+              <a:t> 157  </a:t>
             </a:r>
             <a:r>
               <a:rPr sz="1400">
@@ -5687,7 +5687,7 @@
                 </a:solidFill>
                 <a:latin typeface="Consolas"/>
               </a:rPr>
-              <a:t> 155  </a:t>
+              <a:t> 158  </a:t>
             </a:r>
             <a:r>
               <a:rPr sz="1400">
@@ -5712,7 +5712,7 @@
                 </a:solidFill>
                 <a:latin typeface="Consolas"/>
               </a:rPr>
-              <a:t> 156  </a:t>
+              <a:t> 159  </a:t>
             </a:r>
             <a:r>
               <a:rPr sz="1400">
@@ -5737,7 +5737,7 @@
                 </a:solidFill>
                 <a:latin typeface="Consolas"/>
               </a:rPr>
-              <a:t> 157  </a:t>
+              <a:t> 160  </a:t>
             </a:r>
             <a:r>
               <a:rPr sz="1400">
@@ -5762,7 +5762,7 @@
                 </a:solidFill>
                 <a:latin typeface="Consolas"/>
               </a:rPr>
-              <a:t> 158  </a:t>
+              <a:t> 161  </a:t>
             </a:r>
             <a:r>
               <a:rPr sz="1400">
@@ -5787,7 +5787,7 @@
                 </a:solidFill>
                 <a:latin typeface="Consolas"/>
               </a:rPr>
-              <a:t> 159  </a:t>
+              <a:t> 162  </a:t>
             </a:r>
             <a:r>
               <a:rPr sz="1400">
@@ -5812,7 +5812,7 @@
                 </a:solidFill>
                 <a:latin typeface="Consolas"/>
               </a:rPr>
-              <a:t> 160  </a:t>
+              <a:t> 163  </a:t>
             </a:r>
             <a:r>
               <a:rPr sz="1400">
@@ -5837,7 +5837,7 @@
                 </a:solidFill>
                 <a:latin typeface="Consolas"/>
               </a:rPr>
-              <a:t> 161  </a:t>
+              <a:t> 164  </a:t>
             </a:r>
             <a:r>
               <a:rPr sz="1400">
@@ -5862,7 +5862,7 @@
                 </a:solidFill>
                 <a:latin typeface="Consolas"/>
               </a:rPr>
-              <a:t> 162  </a:t>
+              <a:t> 165  </a:t>
             </a:r>
             <a:r>
               <a:rPr sz="1400">
@@ -5887,7 +5887,7 @@
                 </a:solidFill>
                 <a:latin typeface="Consolas"/>
               </a:rPr>
-              <a:t> 163  </a:t>
+              <a:t> 166  </a:t>
             </a:r>
             <a:r>
               <a:rPr sz="1400">
@@ -5912,7 +5912,7 @@
                 </a:solidFill>
                 <a:latin typeface="Consolas"/>
               </a:rPr>
-              <a:t> 164  </a:t>
+              <a:t> 167  </a:t>
             </a:r>
             <a:r>
               <a:rPr sz="1400">
@@ -5937,7 +5937,7 @@
                 </a:solidFill>
                 <a:latin typeface="Consolas"/>
               </a:rPr>
-              <a:t> 165  </a:t>
+              <a:t> 168  </a:t>
             </a:r>
             <a:r>
               <a:rPr sz="1400">

--- a/ai101/slides/week-13.pptx
+++ b/ai101/slides/week-13.pptx
@@ -3258,7 +3258,7 @@
                 </a:solidFill>
                 <a:latin typeface="Consolas"/>
               </a:rPr>
-              <a:t> 169  </a:t>
+              <a:t> 177  </a:t>
             </a:r>
             <a:r>
               <a:rPr sz="1700">
@@ -3283,7 +3283,7 @@
                 </a:solidFill>
                 <a:latin typeface="Consolas"/>
               </a:rPr>
-              <a:t> 170  </a:t>
+              <a:t> 178  </a:t>
             </a:r>
             <a:r>
               <a:rPr sz="1700">
@@ -4514,7 +4514,7 @@
                 </a:solidFill>
                 <a:latin typeface="Consolas"/>
               </a:rPr>
-              <a:t>  29  </a:t>
+              <a:t>  34  </a:t>
             </a:r>
             <a:r>
               <a:rPr sz="1700">
@@ -4539,7 +4539,7 @@
                 </a:solidFill>
                 <a:latin typeface="Consolas"/>
               </a:rPr>
-              <a:t>  30  </a:t>
+              <a:t>  35  </a:t>
             </a:r>
             <a:r>
               <a:rPr sz="1700">
@@ -4564,7 +4564,7 @@
                 </a:solidFill>
                 <a:latin typeface="Consolas"/>
               </a:rPr>
-              <a:t>  31  </a:t>
+              <a:t>  36  </a:t>
             </a:r>
             <a:r>
               <a:rPr sz="1700">
@@ -4589,7 +4589,7 @@
                 </a:solidFill>
                 <a:latin typeface="Consolas"/>
               </a:rPr>
-              <a:t>  32  </a:t>
+              <a:t>  37  </a:t>
             </a:r>
             <a:r>
               <a:rPr sz="1700">
@@ -4614,7 +4614,7 @@
                 </a:solidFill>
                 <a:latin typeface="Consolas"/>
               </a:rPr>
-              <a:t>  33  </a:t>
+              <a:t>  38  </a:t>
             </a:r>
             <a:r>
               <a:rPr sz="1700">
@@ -4639,7 +4639,7 @@
                 </a:solidFill>
                 <a:latin typeface="Consolas"/>
               </a:rPr>
-              <a:t>  34  </a:t>
+              <a:t>  39  </a:t>
             </a:r>
             <a:r>
               <a:rPr sz="1700">
@@ -4664,7 +4664,7 @@
                 </a:solidFill>
                 <a:latin typeface="Consolas"/>
               </a:rPr>
-              <a:t>  35  </a:t>
+              <a:t>  40  </a:t>
             </a:r>
             <a:r>
               <a:rPr sz="1700">
@@ -4689,7 +4689,7 @@
                 </a:solidFill>
                 <a:latin typeface="Consolas"/>
               </a:rPr>
-              <a:t>  36  </a:t>
+              <a:t>  41  </a:t>
             </a:r>
             <a:r>
               <a:rPr sz="1700">
@@ -4714,7 +4714,7 @@
                 </a:solidFill>
                 <a:latin typeface="Consolas"/>
               </a:rPr>
-              <a:t>  37  </a:t>
+              <a:t>  42  </a:t>
             </a:r>
             <a:r>
               <a:rPr sz="1700">
@@ -5155,7 +5155,7 @@
                 </a:solidFill>
                 <a:latin typeface="Consolas"/>
               </a:rPr>
-              <a:t>  11  </a:t>
+              <a:t>  16  </a:t>
             </a:r>
             <a:r>
               <a:rPr sz="1400">
@@ -5180,7 +5180,7 @@
                 </a:solidFill>
                 <a:latin typeface="Consolas"/>
               </a:rPr>
-              <a:t>  12  </a:t>
+              <a:t>  17  </a:t>
             </a:r>
             <a:r>
               <a:rPr sz="1400">
@@ -5205,7 +5205,7 @@
                 </a:solidFill>
                 <a:latin typeface="Consolas"/>
               </a:rPr>
-              <a:t>  13  </a:t>
+              <a:t>  18  </a:t>
             </a:r>
             <a:r>
               <a:rPr sz="1400">
@@ -5230,7 +5230,7 @@
                 </a:solidFill>
                 <a:latin typeface="Consolas"/>
               </a:rPr>
-              <a:t>  14  </a:t>
+              <a:t>  19  </a:t>
             </a:r>
             <a:r>
               <a:rPr sz="1400">
@@ -5255,7 +5255,7 @@
                 </a:solidFill>
                 <a:latin typeface="Consolas"/>
               </a:rPr>
-              <a:t>  15  </a:t>
+              <a:t>  20  </a:t>
             </a:r>
             <a:r>
               <a:rPr sz="1400">
@@ -5280,7 +5280,7 @@
                 </a:solidFill>
                 <a:latin typeface="Consolas"/>
               </a:rPr>
-              <a:t>  16  </a:t>
+              <a:t>  21  </a:t>
             </a:r>
             <a:r>
               <a:rPr sz="1400">
@@ -5305,7 +5305,7 @@
                 </a:solidFill>
                 <a:latin typeface="Consolas"/>
               </a:rPr>
-              <a:t>  17  </a:t>
+              <a:t>  22  </a:t>
             </a:r>
             <a:r>
               <a:rPr sz="1400">
@@ -5330,7 +5330,7 @@
                 </a:solidFill>
                 <a:latin typeface="Consolas"/>
               </a:rPr>
-              <a:t>  18  </a:t>
+              <a:t>  23  </a:t>
             </a:r>
             <a:r>
               <a:rPr sz="1400">
@@ -5355,7 +5355,7 @@
                 </a:solidFill>
                 <a:latin typeface="Consolas"/>
               </a:rPr>
-              <a:t>  19  </a:t>
+              <a:t>  24  </a:t>
             </a:r>
             <a:r>
               <a:rPr sz="1400">
@@ -5380,7 +5380,7 @@
                 </a:solidFill>
                 <a:latin typeface="Consolas"/>
               </a:rPr>
-              <a:t>  20  </a:t>
+              <a:t>  25  </a:t>
             </a:r>
             <a:r>
               <a:rPr sz="1400">
@@ -5405,7 +5405,7 @@
                 </a:solidFill>
                 <a:latin typeface="Consolas"/>
               </a:rPr>
-              <a:t>  21  </a:t>
+              <a:t>  26  </a:t>
             </a:r>
             <a:r>
               <a:rPr sz="1400">
@@ -5430,7 +5430,7 @@
                 </a:solidFill>
                 <a:latin typeface="Consolas"/>
               </a:rPr>
-              <a:t>  22  </a:t>
+              <a:t>  27  </a:t>
             </a:r>
             <a:r>
               <a:rPr sz="1400">
@@ -5455,7 +5455,7 @@
                 </a:solidFill>
                 <a:latin typeface="Consolas"/>
               </a:rPr>
-              <a:t>  23  </a:t>
+              <a:t>  28  </a:t>
             </a:r>
             <a:r>
               <a:rPr sz="1400">
@@ -5480,7 +5480,7 @@
                 </a:solidFill>
                 <a:latin typeface="Consolas"/>
               </a:rPr>
-              <a:t>  24  </a:t>
+              <a:t>  29  </a:t>
             </a:r>
             <a:r>
               <a:rPr sz="1400">
@@ -5587,7 +5587,7 @@
                 </a:solidFill>
                 <a:latin typeface="Consolas"/>
               </a:rPr>
-              <a:t> 154  </a:t>
+              <a:t> 162  </a:t>
             </a:r>
             <a:r>
               <a:rPr sz="1400">
@@ -5612,7 +5612,7 @@
                 </a:solidFill>
                 <a:latin typeface="Consolas"/>
               </a:rPr>
-              <a:t> 155  </a:t>
+              <a:t> 163  </a:t>
             </a:r>
             <a:r>
               <a:rPr sz="1400">
@@ -5637,7 +5637,7 @@
                 </a:solidFill>
                 <a:latin typeface="Consolas"/>
               </a:rPr>
-              <a:t> 156  </a:t>
+              <a:t> 164  </a:t>
             </a:r>
             <a:r>
               <a:rPr sz="1400">
@@ -5662,7 +5662,7 @@
                 </a:solidFill>
                 <a:latin typeface="Consolas"/>
               </a:rPr>
-              <a:t> 157  </a:t>
+              <a:t> 165  </a:t>
             </a:r>
             <a:r>
               <a:rPr sz="1400">
@@ -5687,7 +5687,7 @@
                 </a:solidFill>
                 <a:latin typeface="Consolas"/>
               </a:rPr>
-              <a:t> 158  </a:t>
+              <a:t> 166  </a:t>
             </a:r>
             <a:r>
               <a:rPr sz="1400">
@@ -5712,7 +5712,7 @@
                 </a:solidFill>
                 <a:latin typeface="Consolas"/>
               </a:rPr>
-              <a:t> 159  </a:t>
+              <a:t> 167  </a:t>
             </a:r>
             <a:r>
               <a:rPr sz="1400">
@@ -5737,7 +5737,7 @@
                 </a:solidFill>
                 <a:latin typeface="Consolas"/>
               </a:rPr>
-              <a:t> 160  </a:t>
+              <a:t> 168  </a:t>
             </a:r>
             <a:r>
               <a:rPr sz="1400">
@@ -5762,7 +5762,7 @@
                 </a:solidFill>
                 <a:latin typeface="Consolas"/>
               </a:rPr>
-              <a:t> 161  </a:t>
+              <a:t> 169  </a:t>
             </a:r>
             <a:r>
               <a:rPr sz="1400">
@@ -5787,7 +5787,7 @@
                 </a:solidFill>
                 <a:latin typeface="Consolas"/>
               </a:rPr>
-              <a:t> 162  </a:t>
+              <a:t> 170  </a:t>
             </a:r>
             <a:r>
               <a:rPr sz="1400">
@@ -5812,7 +5812,7 @@
                 </a:solidFill>
                 <a:latin typeface="Consolas"/>
               </a:rPr>
-              <a:t> 163  </a:t>
+              <a:t> 171  </a:t>
             </a:r>
             <a:r>
               <a:rPr sz="1400">
@@ -5837,7 +5837,7 @@
                 </a:solidFill>
                 <a:latin typeface="Consolas"/>
               </a:rPr>
-              <a:t> 164  </a:t>
+              <a:t> 172  </a:t>
             </a:r>
             <a:r>
               <a:rPr sz="1400">
@@ -5862,7 +5862,7 @@
                 </a:solidFill>
                 <a:latin typeface="Consolas"/>
               </a:rPr>
-              <a:t> 165  </a:t>
+              <a:t> 173  </a:t>
             </a:r>
             <a:r>
               <a:rPr sz="1400">
@@ -5887,7 +5887,7 @@
                 </a:solidFill>
                 <a:latin typeface="Consolas"/>
               </a:rPr>
-              <a:t> 166  </a:t>
+              <a:t> 174  </a:t>
             </a:r>
             <a:r>
               <a:rPr sz="1400">
@@ -5912,7 +5912,7 @@
                 </a:solidFill>
                 <a:latin typeface="Consolas"/>
               </a:rPr>
-              <a:t> 167  </a:t>
+              <a:t> 175  </a:t>
             </a:r>
             <a:r>
               <a:rPr sz="1400">
@@ -5937,7 +5937,7 @@
                 </a:solidFill>
                 <a:latin typeface="Consolas"/>
               </a:rPr>
-              <a:t> 168  </a:t>
+              <a:t> 176  </a:t>
             </a:r>
             <a:r>
               <a:rPr sz="1400">

--- a/ai101/slides/week-13.pptx
+++ b/ai101/slides/week-13.pptx
@@ -4619,12 +4619,27 @@
               </a:spcAft>
             </a:pPr>
             <a:r>
+              <a:rPr sz="2800">
+                <a:solidFill>
+                  <a:srgbClr val="01AEFD"/>
+                </a:solidFill>
+              </a:rPr>
+              <a:t>Object.keys(PRESETS)</a:t>
+            </a:r>
+          </a:p>
+          <a:p>
+            <a:pPr>
+              <a:spcAft>
+                <a:spcPts val="1400"/>
+              </a:spcAft>
+            </a:pPr>
+            <a:r>
               <a:rPr sz="2400">
                 <a:solidFill>
                   <a:srgbClr val="1F2A37"/>
                 </a:solidFill>
               </a:rPr>
-              <a:t>• The list of an object's key NAMES.</a:t>
+              <a:t>• The list of an object's key NAMES (objects were week 3).</a:t>
             </a:r>
           </a:p>
           <a:p>
@@ -4639,7 +4654,22 @@
                   <a:srgbClr val="1F2A37"/>
                 </a:solidFill>
               </a:rPr>
-              <a:t>• Object.keys(PRESETS) gives every character's name, so we can loop over them.</a:t>
+              <a:t>• Object.keys(PRESETS) gives every character's name.</a:t>
+            </a:r>
+          </a:p>
+          <a:p>
+            <a:pPr>
+              <a:spcAft>
+                <a:spcPts val="1400"/>
+              </a:spcAft>
+            </a:pPr>
+            <a:r>
+              <a:rPr sz="2400">
+                <a:solidFill>
+                  <a:srgbClr val="1F2A37"/>
+                </a:solidFill>
+              </a:rPr>
+              <a:t>• Feed that list to for...of (week 8) to build one button each.</a:t>
             </a:r>
           </a:p>
         </p:txBody>
@@ -15175,12 +15205,57 @@
               </a:spcAft>
             </a:pPr>
             <a:r>
+              <a:rPr sz="2800">
+                <a:solidFill>
+                  <a:srgbClr val="01AEFD"/>
+                </a:solidFill>
+              </a:rPr>
+              <a:t>border-color: #01aefd;</a:t>
+            </a:r>
+          </a:p>
+          <a:p>
+            <a:pPr>
+              <a:spcAft>
+                <a:spcPts val="1400"/>
+              </a:spcAft>
+            </a:pPr>
+            <a:r>
               <a:rPr sz="2400">
                 <a:solidFill>
                   <a:srgbClr val="1F2A37"/>
                 </a:solidFill>
               </a:rPr>
               <a:t>• Changes just the COLOUR of a border that already exists.</a:t>
+            </a:r>
+          </a:p>
+          <a:p>
+            <a:pPr>
+              <a:spcAft>
+                <a:spcPts val="1400"/>
+              </a:spcAft>
+            </a:pPr>
+            <a:r>
+              <a:rPr sz="2400">
+                <a:solidFill>
+                  <a:srgbClr val="1F2A37"/>
+                </a:solidFill>
+              </a:rPr>
+              <a:t>• border (week 2) set thickness, style AND colour at once; this tweaks the colour.</a:t>
+            </a:r>
+          </a:p>
+          <a:p>
+            <a:pPr>
+              <a:spcAft>
+                <a:spcPts val="1400"/>
+              </a:spcAft>
+            </a:pPr>
+            <a:r>
+              <a:rPr sz="2400">
+                <a:solidFill>
+                  <a:srgbClr val="1F2A37"/>
+                </a:solidFill>
+              </a:rPr>
+              <a:t>• Used on hover to make a button glow blue.</a:t>
             </a:r>
           </a:p>
         </p:txBody>

--- a/ai101/slides/week-13.pptx
+++ b/ai101/slides/week-13.pptx
@@ -56,6 +56,7 @@
     <p:sldId id="304" r:id="rId55"/>
     <p:sldId id="305" r:id="rId56"/>
     <p:sldId id="306" r:id="rId57"/>
+    <p:sldId id="307" r:id="rId58"/>
   </p:sldIdLst>
   <p:sldSz cx="12191695" cy="6858000" type="screen4x3"/>
   <p:notesSz cx="6858000" cy="9144000"/>
@@ -15274,7 +15275,7 @@
     <p:bg>
       <p:bgPr>
         <a:solidFill>
-          <a:srgbClr val="102127"/>
+          <a:srgbClr val="F4F8FB"/>
         </a:solidFill>
         <a:effectLst/>
       </p:bgPr>
@@ -15294,8 +15295,8 @@
         </p:nvSpPr>
         <p:spPr>
           <a:xfrm>
-            <a:off x="502920" y="274320"/>
-            <a:ext cx="11155680" cy="548640"/>
+            <a:off x="822960" y="365760"/>
+            <a:ext cx="7315200" cy="365760"/>
           </a:xfrm>
           <a:prstGeom prst="rect">
             <a:avLst/>
@@ -15309,12 +15310,12 @@
           <a:lstStyle/>
           <a:p>
             <a:r>
-              <a:rPr sz="2200" b="1">
+              <a:rPr sz="1400" b="1">
                 <a:solidFill>
                   <a:srgbClr val="01AEFD"/>
                 </a:solidFill>
               </a:rPr>
-              <a:t>Type this into style.css   -   line 99</a:t>
+              <a:t>ON THE PAGE</a:t>
             </a:r>
           </a:p>
         </p:txBody>
@@ -15327,8 +15328,8 @@
         </p:nvSpPr>
         <p:spPr>
           <a:xfrm>
-            <a:off x="502920" y="960120"/>
-            <a:ext cx="11155680" cy="4297680"/>
+            <a:off x="822960" y="658368"/>
+            <a:ext cx="10515600" cy="731520"/>
           </a:xfrm>
           <a:prstGeom prst="rect">
             <a:avLst/>
@@ -15341,417 +15342,511 @@
           </a:bodyPr>
           <a:lstStyle/>
           <a:p>
-            <a:pPr>
-              <a:spcAft>
-                <a:spcPts val="0"/>
-              </a:spcAft>
-            </a:pPr>
-            <a:r>
-              <a:rPr sz="1300">
-                <a:solidFill>
-                  <a:srgbClr val="6D8C97"/>
-                </a:solidFill>
-                <a:latin typeface="Consolas"/>
-              </a:rPr>
-              <a:t>  84  </a:t>
-            </a:r>
-            <a:r>
-              <a:rPr sz="1300">
-                <a:solidFill>
-                  <a:srgbClr val="6D8C97"/>
-                </a:solidFill>
-                <a:latin typeface="Consolas"/>
-              </a:rPr>
-              <a:t>.bubble.writing::after {</a:t>
-            </a:r>
-          </a:p>
-          <a:p>
-            <a:pPr>
-              <a:spcAft>
-                <a:spcPts val="0"/>
-              </a:spcAft>
-            </a:pPr>
-            <a:r>
-              <a:rPr sz="1300">
-                <a:solidFill>
-                  <a:srgbClr val="6D8C97"/>
-                </a:solidFill>
-                <a:latin typeface="Consolas"/>
-              </a:rPr>
-              <a:t>  85  </a:t>
-            </a:r>
-            <a:r>
-              <a:rPr sz="1300">
-                <a:solidFill>
-                  <a:srgbClr val="6D8C97"/>
-                </a:solidFill>
-                <a:latin typeface="Consolas"/>
-              </a:rPr>
-              <a:t>  content: "\258C";</a:t>
-            </a:r>
-          </a:p>
-          <a:p>
-            <a:pPr>
-              <a:spcAft>
-                <a:spcPts val="0"/>
-              </a:spcAft>
-            </a:pPr>
-            <a:r>
-              <a:rPr sz="1300">
-                <a:solidFill>
-                  <a:srgbClr val="6D8C97"/>
-                </a:solidFill>
-                <a:latin typeface="Consolas"/>
-              </a:rPr>
-              <a:t>  86  </a:t>
-            </a:r>
-            <a:r>
-              <a:rPr sz="1300">
-                <a:solidFill>
-                  <a:srgbClr val="6D8C97"/>
-                </a:solidFill>
-                <a:latin typeface="Consolas"/>
-              </a:rPr>
-              <a:t>  color: #01aefd;</a:t>
-            </a:r>
-          </a:p>
-          <a:p>
-            <a:pPr>
-              <a:spcAft>
-                <a:spcPts val="0"/>
-              </a:spcAft>
-            </a:pPr>
-            <a:r>
-              <a:rPr sz="1300">
-                <a:solidFill>
-                  <a:srgbClr val="6D8C97"/>
-                </a:solidFill>
-                <a:latin typeface="Consolas"/>
-              </a:rPr>
-              <a:t>  87  </a:t>
-            </a:r>
-            <a:r>
-              <a:rPr sz="1300">
-                <a:solidFill>
-                  <a:srgbClr val="6D8C97"/>
-                </a:solidFill>
-                <a:latin typeface="Consolas"/>
-              </a:rPr>
-              <a:t>  animation: blink 1s steps(2, start) infinite;</a:t>
-            </a:r>
-          </a:p>
-          <a:p>
-            <a:pPr>
-              <a:spcAft>
-                <a:spcPts val="0"/>
-              </a:spcAft>
-            </a:pPr>
-            <a:r>
-              <a:rPr sz="1300">
-                <a:solidFill>
-                  <a:srgbClr val="6D8C97"/>
-                </a:solidFill>
-                <a:latin typeface="Consolas"/>
-              </a:rPr>
-              <a:t>  88  </a:t>
-            </a:r>
-            <a:r>
-              <a:rPr sz="1300">
-                <a:solidFill>
-                  <a:srgbClr val="6D8C97"/>
-                </a:solidFill>
-                <a:latin typeface="Consolas"/>
-              </a:rPr>
-              <a:t>}</a:t>
-            </a:r>
-          </a:p>
-          <a:p>
-            <a:pPr>
-              <a:spcAft>
-                <a:spcPts val="0"/>
-              </a:spcAft>
-            </a:pPr>
-            <a:r>
-              <a:rPr sz="1300">
-                <a:solidFill>
-                  <a:srgbClr val="6D8C97"/>
-                </a:solidFill>
-                <a:latin typeface="Consolas"/>
-              </a:rPr>
-              <a:t>  89  </a:t>
-            </a:r>
-            <a:r>
-              <a:rPr sz="1300">
-                <a:solidFill>
-                  <a:srgbClr val="6D8C97"/>
-                </a:solidFill>
-                <a:latin typeface="Consolas"/>
-              </a:rPr>
-              <a:t>@keyframes blink { to { visibility: hidden; } }</a:t>
-            </a:r>
-          </a:p>
-          <a:p>
-            <a:pPr>
-              <a:spcAft>
-                <a:spcPts val="0"/>
-              </a:spcAft>
-            </a:pPr>
-            <a:r>
-              <a:rPr sz="1300">
-                <a:solidFill>
-                  <a:srgbClr val="6D8C97"/>
-                </a:solidFill>
-                <a:latin typeface="Consolas"/>
-              </a:rPr>
-              <a:t>  90  </a:t>
-            </a:r>
-            <a:r>
-              <a:rPr sz="1300">
-                <a:solidFill>
-                  <a:srgbClr val="6D8C97"/>
-                </a:solidFill>
-                <a:latin typeface="Consolas"/>
-              </a:rPr>
-              <a:t>.presets { display: flex; flex-wrap: wrap; gap: 6px; margin-bottom: 8px; }</a:t>
-            </a:r>
-          </a:p>
-          <a:p>
-            <a:pPr>
-              <a:spcAft>
-                <a:spcPts val="0"/>
-              </a:spcAft>
-            </a:pPr>
-            <a:r>
-              <a:rPr sz="1300">
-                <a:solidFill>
-                  <a:srgbClr val="6D8C97"/>
-                </a:solidFill>
-                <a:latin typeface="Consolas"/>
-              </a:rPr>
-              <a:t>  91  </a:t>
-            </a:r>
-            <a:r>
-              <a:rPr sz="1300">
-                <a:solidFill>
-                  <a:srgbClr val="6D8C97"/>
-                </a:solidFill>
-                <a:latin typeface="Consolas"/>
-              </a:rPr>
-              <a:t>.preset {</a:t>
-            </a:r>
-          </a:p>
-          <a:p>
-            <a:pPr>
-              <a:spcAft>
-                <a:spcPts val="0"/>
-              </a:spcAft>
-            </a:pPr>
-            <a:r>
-              <a:rPr sz="1300">
-                <a:solidFill>
-                  <a:srgbClr val="6D8C97"/>
-                </a:solidFill>
-                <a:latin typeface="Consolas"/>
-              </a:rPr>
-              <a:t>  92  </a:t>
-            </a:r>
-            <a:r>
-              <a:rPr sz="1300">
-                <a:solidFill>
-                  <a:srgbClr val="6D8C97"/>
-                </a:solidFill>
-                <a:latin typeface="Consolas"/>
-              </a:rPr>
-              <a:t>  padding: 5px 11px;</a:t>
-            </a:r>
-          </a:p>
-          <a:p>
-            <a:pPr>
-              <a:spcAft>
-                <a:spcPts val="0"/>
-              </a:spcAft>
-            </a:pPr>
-            <a:r>
-              <a:rPr sz="1300">
-                <a:solidFill>
-                  <a:srgbClr val="6D8C97"/>
-                </a:solidFill>
-                <a:latin typeface="Consolas"/>
-              </a:rPr>
-              <a:t>  93  </a:t>
-            </a:r>
-            <a:r>
-              <a:rPr sz="1300">
-                <a:solidFill>
-                  <a:srgbClr val="6D8C97"/>
-                </a:solidFill>
-                <a:latin typeface="Consolas"/>
-              </a:rPr>
-              <a:t>  border: 1px solid #dbe3ec;</a:t>
-            </a:r>
-          </a:p>
-          <a:p>
-            <a:pPr>
-              <a:spcAft>
-                <a:spcPts val="0"/>
-              </a:spcAft>
-            </a:pPr>
-            <a:r>
-              <a:rPr sz="1300">
-                <a:solidFill>
-                  <a:srgbClr val="6D8C97"/>
-                </a:solidFill>
-                <a:latin typeface="Consolas"/>
-              </a:rPr>
-              <a:t>  94  </a:t>
-            </a:r>
-            <a:r>
-              <a:rPr sz="1300">
-                <a:solidFill>
-                  <a:srgbClr val="6D8C97"/>
-                </a:solidFill>
-                <a:latin typeface="Consolas"/>
-              </a:rPr>
-              <a:t>  border-radius: 20px;</a:t>
-            </a:r>
-          </a:p>
-          <a:p>
-            <a:pPr>
-              <a:spcAft>
-                <a:spcPts val="0"/>
-              </a:spcAft>
-            </a:pPr>
-            <a:r>
-              <a:rPr sz="1300">
-                <a:solidFill>
-                  <a:srgbClr val="6D8C97"/>
-                </a:solidFill>
-                <a:latin typeface="Consolas"/>
-              </a:rPr>
-              <a:t>  95  </a:t>
-            </a:r>
-            <a:r>
-              <a:rPr sz="1300">
-                <a:solidFill>
-                  <a:srgbClr val="6D8C97"/>
-                </a:solidFill>
-                <a:latin typeface="Consolas"/>
-              </a:rPr>
-              <a:t>  background: #ffffff;</a:t>
-            </a:r>
-          </a:p>
-          <a:p>
-            <a:pPr>
-              <a:spcAft>
-                <a:spcPts val="0"/>
-              </a:spcAft>
-            </a:pPr>
-            <a:r>
-              <a:rPr sz="1300">
-                <a:solidFill>
-                  <a:srgbClr val="6D8C97"/>
-                </a:solidFill>
-                <a:latin typeface="Consolas"/>
-              </a:rPr>
-              <a:t>  96  </a:t>
-            </a:r>
-            <a:r>
-              <a:rPr sz="1300">
-                <a:solidFill>
-                  <a:srgbClr val="6D8C97"/>
-                </a:solidFill>
-                <a:latin typeface="Consolas"/>
-              </a:rPr>
-              <a:t>  font-size: 13px;</a:t>
-            </a:r>
-          </a:p>
-          <a:p>
-            <a:pPr>
-              <a:spcAft>
-                <a:spcPts val="0"/>
-              </a:spcAft>
-            </a:pPr>
-            <a:r>
-              <a:rPr sz="1300">
-                <a:solidFill>
-                  <a:srgbClr val="6D8C97"/>
-                </a:solidFill>
-                <a:latin typeface="Consolas"/>
-              </a:rPr>
-              <a:t>  97  </a:t>
-            </a:r>
-            <a:r>
-              <a:rPr sz="1300">
-                <a:solidFill>
-                  <a:srgbClr val="6D8C97"/>
-                </a:solidFill>
-                <a:latin typeface="Consolas"/>
-              </a:rPr>
-              <a:t>  cursor: pointer;</a:t>
-            </a:r>
-          </a:p>
-          <a:p>
-            <a:pPr>
-              <a:spcAft>
-                <a:spcPts val="0"/>
-              </a:spcAft>
-            </a:pPr>
-            <a:r>
-              <a:rPr sz="1300">
-                <a:solidFill>
-                  <a:srgbClr val="6D8C97"/>
-                </a:solidFill>
-                <a:latin typeface="Consolas"/>
-              </a:rPr>
-              <a:t>  98  </a:t>
-            </a:r>
-            <a:r>
-              <a:rPr sz="1300">
-                <a:solidFill>
-                  <a:srgbClr val="6D8C97"/>
-                </a:solidFill>
-                <a:latin typeface="Consolas"/>
-              </a:rPr>
-              <a:t>}</a:t>
-            </a:r>
-          </a:p>
-          <a:p>
-            <a:pPr>
-              <a:spcAft>
-                <a:spcPts val="0"/>
-              </a:spcAft>
-            </a:pPr>
-            <a:r>
-              <a:rPr sz="1300">
-                <a:solidFill>
-                  <a:srgbClr val="6D8C97"/>
-                </a:solidFill>
-                <a:latin typeface="Consolas"/>
-              </a:rPr>
-              <a:t>  99  </a:t>
-            </a:r>
-            <a:r>
-              <a:rPr sz="1300">
-                <a:solidFill>
-                  <a:srgbClr val="7FE0A0"/>
-                </a:solidFill>
-                <a:latin typeface="Consolas"/>
-              </a:rPr>
-              <a:t>.preset:hover { border-color: #01aefd; color: #0a6299; }</a:t>
-            </a:r>
-          </a:p>
-        </p:txBody>
-      </p:sp>
-      <p:sp>
-        <p:nvSpPr>
-          <p:cNvPr id="4" name="TextBox 3"/>
+            <a:r>
+              <a:rPr sz="3200" b="1">
+                <a:solidFill>
+                  <a:srgbClr val="1F2A37"/>
+                </a:solidFill>
+              </a:rPr>
+              <a:t>border-color</a:t>
+            </a:r>
+          </a:p>
+        </p:txBody>
+      </p:sp>
+      <p:sp>
+        <p:nvSpPr>
+          <p:cNvPr id="4" name="Rounded Rectangle 3"/>
+          <p:cNvSpPr/>
+          <p:nvPr/>
+        </p:nvSpPr>
+        <p:spPr>
+          <a:xfrm>
+            <a:off x="3454237" y="1641896"/>
+            <a:ext cx="5249387" cy="3918021"/>
+          </a:xfrm>
+          <a:prstGeom prst="roundRect">
+            <a:avLst/>
+          </a:prstGeom>
+          <a:solidFill>
+            <a:srgbClr val="0F1F27"/>
+          </a:solidFill>
+          <a:ln>
+            <a:noFill/>
+          </a:ln>
+          <a:effectLst/>
+        </p:spPr>
+        <p:style>
+          <a:lnRef idx="1">
+            <a:schemeClr val="accent1"/>
+          </a:lnRef>
+          <a:fillRef idx="3">
+            <a:schemeClr val="accent1"/>
+          </a:fillRef>
+          <a:effectRef idx="2">
+            <a:schemeClr val="accent1"/>
+          </a:effectRef>
+          <a:fontRef idx="minor">
+            <a:schemeClr val="lt1"/>
+          </a:fontRef>
+        </p:style>
+        <p:txBody>
+          <a:bodyPr rtlCol="0" anchor="ctr"/>
+          <a:lstStyle/>
+          <a:p>
+            <a:pPr algn="ctr"/>
+          </a:p>
+        </p:txBody>
+      </p:sp>
+      <p:sp>
+        <p:nvSpPr>
+          <p:cNvPr id="5" name="Rounded Rectangle 4"/>
+          <p:cNvSpPr/>
+          <p:nvPr/>
+        </p:nvSpPr>
+        <p:spPr>
+          <a:xfrm>
+            <a:off x="3606393" y="2022287"/>
+            <a:ext cx="4945075" cy="437448"/>
+          </a:xfrm>
+          <a:prstGeom prst="roundRect">
+            <a:avLst/>
+          </a:prstGeom>
+          <a:solidFill>
+            <a:srgbClr val="16303A"/>
+          </a:solidFill>
+          <a:ln>
+            <a:noFill/>
+          </a:ln>
+          <a:effectLst/>
+        </p:spPr>
+        <p:style>
+          <a:lnRef idx="1">
+            <a:schemeClr val="accent1"/>
+          </a:lnRef>
+          <a:fillRef idx="3">
+            <a:schemeClr val="accent1"/>
+          </a:fillRef>
+          <a:effectRef idx="2">
+            <a:schemeClr val="accent1"/>
+          </a:effectRef>
+          <a:fontRef idx="minor">
+            <a:schemeClr val="lt1"/>
+          </a:fontRef>
+        </p:style>
+        <p:txBody>
+          <a:bodyPr rtlCol="0" anchor="ctr"/>
+          <a:lstStyle/>
+          <a:p>
+            <a:pPr algn="ctr"/>
+          </a:p>
+        </p:txBody>
+      </p:sp>
+      <p:sp>
+        <p:nvSpPr>
+          <p:cNvPr id="6" name="Rounded Rectangle 5"/>
+          <p:cNvSpPr/>
+          <p:nvPr/>
+        </p:nvSpPr>
+        <p:spPr>
+          <a:xfrm>
+            <a:off x="3720510" y="2155423"/>
+            <a:ext cx="1426463" cy="190195"/>
+          </a:xfrm>
+          <a:prstGeom prst="roundRect">
+            <a:avLst/>
+          </a:prstGeom>
+          <a:solidFill>
+            <a:srgbClr val="4A6B78"/>
+          </a:solidFill>
+          <a:ln>
+            <a:noFill/>
+          </a:ln>
+          <a:effectLst/>
+        </p:spPr>
+        <p:style>
+          <a:lnRef idx="1">
+            <a:schemeClr val="accent1"/>
+          </a:lnRef>
+          <a:fillRef idx="3">
+            <a:schemeClr val="accent1"/>
+          </a:fillRef>
+          <a:effectRef idx="2">
+            <a:schemeClr val="accent1"/>
+          </a:effectRef>
+          <a:fontRef idx="minor">
+            <a:schemeClr val="lt1"/>
+          </a:fontRef>
+        </p:style>
+        <p:txBody>
+          <a:bodyPr rtlCol="0" anchor="ctr"/>
+          <a:lstStyle/>
+          <a:p>
+            <a:pPr algn="ctr"/>
+          </a:p>
+        </p:txBody>
+      </p:sp>
+      <p:sp>
+        <p:nvSpPr>
+          <p:cNvPr id="7" name="Rounded Rectangle 6"/>
+          <p:cNvSpPr/>
+          <p:nvPr/>
+        </p:nvSpPr>
+        <p:spPr>
+          <a:xfrm>
+            <a:off x="3606393" y="2554833"/>
+            <a:ext cx="4945075" cy="1806854"/>
+          </a:xfrm>
+          <a:prstGeom prst="roundRect">
+            <a:avLst/>
+          </a:prstGeom>
+          <a:solidFill>
+            <a:srgbClr val="0B171D"/>
+          </a:solidFill>
+          <a:ln>
+            <a:noFill/>
+          </a:ln>
+          <a:effectLst/>
+        </p:spPr>
+        <p:style>
+          <a:lnRef idx="1">
+            <a:schemeClr val="accent1"/>
+          </a:lnRef>
+          <a:fillRef idx="3">
+            <a:schemeClr val="accent1"/>
+          </a:fillRef>
+          <a:effectRef idx="2">
+            <a:schemeClr val="accent1"/>
+          </a:effectRef>
+          <a:fontRef idx="minor">
+            <a:schemeClr val="lt1"/>
+          </a:fontRef>
+        </p:style>
+        <p:txBody>
+          <a:bodyPr rtlCol="0" anchor="ctr"/>
+          <a:lstStyle/>
+          <a:p>
+            <a:pPr algn="ctr"/>
+          </a:p>
+        </p:txBody>
+      </p:sp>
+      <p:sp>
+        <p:nvSpPr>
+          <p:cNvPr id="8" name="Rounded Rectangle 7"/>
+          <p:cNvSpPr/>
+          <p:nvPr/>
+        </p:nvSpPr>
+        <p:spPr>
+          <a:xfrm>
+            <a:off x="3720510" y="2668950"/>
+            <a:ext cx="2852927" cy="399409"/>
+          </a:xfrm>
+          <a:prstGeom prst="roundRect">
+            <a:avLst/>
+          </a:prstGeom>
+          <a:solidFill>
+            <a:srgbClr val="1B3540"/>
+          </a:solidFill>
+          <a:ln>
+            <a:noFill/>
+          </a:ln>
+          <a:effectLst/>
+        </p:spPr>
+        <p:style>
+          <a:lnRef idx="1">
+            <a:schemeClr val="accent1"/>
+          </a:lnRef>
+          <a:fillRef idx="3">
+            <a:schemeClr val="accent1"/>
+          </a:fillRef>
+          <a:effectRef idx="2">
+            <a:schemeClr val="accent1"/>
+          </a:effectRef>
+          <a:fontRef idx="minor">
+            <a:schemeClr val="lt1"/>
+          </a:fontRef>
+        </p:style>
+        <p:txBody>
+          <a:bodyPr rtlCol="0" anchor="ctr"/>
+          <a:lstStyle/>
+          <a:p>
+            <a:pPr algn="ctr"/>
+          </a:p>
+        </p:txBody>
+      </p:sp>
+      <p:sp>
+        <p:nvSpPr>
+          <p:cNvPr id="9" name="Rounded Rectangle 8"/>
+          <p:cNvSpPr/>
+          <p:nvPr/>
+        </p:nvSpPr>
+        <p:spPr>
+          <a:xfrm>
+            <a:off x="5584423" y="3182477"/>
+            <a:ext cx="2852927" cy="399409"/>
+          </a:xfrm>
+          <a:prstGeom prst="roundRect">
+            <a:avLst/>
+          </a:prstGeom>
+          <a:solidFill>
+            <a:srgbClr val="123A32"/>
+          </a:solidFill>
+          <a:ln>
+            <a:noFill/>
+          </a:ln>
+          <a:effectLst/>
+        </p:spPr>
+        <p:style>
+          <a:lnRef idx="1">
+            <a:schemeClr val="accent1"/>
+          </a:lnRef>
+          <a:fillRef idx="3">
+            <a:schemeClr val="accent1"/>
+          </a:fillRef>
+          <a:effectRef idx="2">
+            <a:schemeClr val="accent1"/>
+          </a:effectRef>
+          <a:fontRef idx="minor">
+            <a:schemeClr val="lt1"/>
+          </a:fontRef>
+        </p:style>
+        <p:txBody>
+          <a:bodyPr rtlCol="0" anchor="ctr"/>
+          <a:lstStyle/>
+          <a:p>
+            <a:pPr algn="ctr"/>
+          </a:p>
+        </p:txBody>
+      </p:sp>
+      <p:sp>
+        <p:nvSpPr>
+          <p:cNvPr id="10" name="Rounded Rectangle 9"/>
+          <p:cNvSpPr/>
+          <p:nvPr/>
+        </p:nvSpPr>
+        <p:spPr>
+          <a:xfrm>
+            <a:off x="3720510" y="3696004"/>
+            <a:ext cx="3138220" cy="399409"/>
+          </a:xfrm>
+          <a:prstGeom prst="roundRect">
+            <a:avLst/>
+          </a:prstGeom>
+          <a:solidFill>
+            <a:srgbClr val="1B3540"/>
+          </a:solidFill>
+          <a:ln>
+            <a:noFill/>
+          </a:ln>
+          <a:effectLst/>
+        </p:spPr>
+        <p:style>
+          <a:lnRef idx="1">
+            <a:schemeClr val="accent1"/>
+          </a:lnRef>
+          <a:fillRef idx="3">
+            <a:schemeClr val="accent1"/>
+          </a:fillRef>
+          <a:effectRef idx="2">
+            <a:schemeClr val="accent1"/>
+          </a:effectRef>
+          <a:fontRef idx="minor">
+            <a:schemeClr val="lt1"/>
+          </a:fontRef>
+        </p:style>
+        <p:txBody>
+          <a:bodyPr rtlCol="0" anchor="ctr"/>
+          <a:lstStyle/>
+          <a:p>
+            <a:pPr algn="ctr"/>
+          </a:p>
+        </p:txBody>
+      </p:sp>
+      <p:sp>
+        <p:nvSpPr>
+          <p:cNvPr id="11" name="Rounded Rectangle 10"/>
+          <p:cNvSpPr/>
+          <p:nvPr/>
+        </p:nvSpPr>
+        <p:spPr>
+          <a:xfrm>
+            <a:off x="3701491" y="4856195"/>
+            <a:ext cx="3899001" cy="323331"/>
+          </a:xfrm>
+          <a:prstGeom prst="roundRect">
+            <a:avLst/>
+          </a:prstGeom>
+          <a:solidFill>
+            <a:srgbClr val="16303A"/>
+          </a:solidFill>
+          <a:ln>
+            <a:noFill/>
+          </a:ln>
+          <a:effectLst/>
+        </p:spPr>
+        <p:style>
+          <a:lnRef idx="1">
+            <a:schemeClr val="accent1"/>
+          </a:lnRef>
+          <a:fillRef idx="3">
+            <a:schemeClr val="accent1"/>
+          </a:fillRef>
+          <a:effectRef idx="2">
+            <a:schemeClr val="accent1"/>
+          </a:effectRef>
+          <a:fontRef idx="minor">
+            <a:schemeClr val="lt1"/>
+          </a:fontRef>
+        </p:style>
+        <p:txBody>
+          <a:bodyPr rtlCol="0" anchor="ctr"/>
+          <a:lstStyle/>
+          <a:p>
+            <a:pPr algn="ctr"/>
+          </a:p>
+        </p:txBody>
+      </p:sp>
+      <p:sp>
+        <p:nvSpPr>
+          <p:cNvPr id="12" name="Rounded Rectangle 11"/>
+          <p:cNvSpPr/>
+          <p:nvPr/>
+        </p:nvSpPr>
+        <p:spPr>
+          <a:xfrm>
+            <a:off x="7695590" y="4856195"/>
+            <a:ext cx="779800" cy="323331"/>
+          </a:xfrm>
+          <a:prstGeom prst="roundRect">
+            <a:avLst/>
+          </a:prstGeom>
+          <a:solidFill>
+            <a:srgbClr val="01AEFD"/>
+          </a:solidFill>
+          <a:ln>
+            <a:noFill/>
+          </a:ln>
+          <a:effectLst/>
+        </p:spPr>
+        <p:style>
+          <a:lnRef idx="1">
+            <a:schemeClr val="accent1"/>
+          </a:lnRef>
+          <a:fillRef idx="3">
+            <a:schemeClr val="accent1"/>
+          </a:fillRef>
+          <a:effectRef idx="2">
+            <a:schemeClr val="accent1"/>
+          </a:effectRef>
+          <a:fontRef idx="minor">
+            <a:schemeClr val="lt1"/>
+          </a:fontRef>
+        </p:style>
+        <p:txBody>
+          <a:bodyPr rtlCol="0" anchor="ctr"/>
+          <a:lstStyle/>
+          <a:p>
+            <a:pPr algn="ctr"/>
+          </a:p>
+        </p:txBody>
+      </p:sp>
+      <p:sp>
+        <p:nvSpPr>
+          <p:cNvPr id="13" name="Rounded Rectangle 12"/>
+          <p:cNvSpPr/>
+          <p:nvPr/>
+        </p:nvSpPr>
+        <p:spPr>
+          <a:xfrm>
+            <a:off x="3720510" y="5407761"/>
+            <a:ext cx="1616659" cy="95097"/>
+          </a:xfrm>
+          <a:prstGeom prst="roundRect">
+            <a:avLst/>
+          </a:prstGeom>
+          <a:solidFill>
+            <a:srgbClr val="2A4550"/>
+          </a:solidFill>
+          <a:ln>
+            <a:noFill/>
+          </a:ln>
+          <a:effectLst/>
+        </p:spPr>
+        <p:style>
+          <a:lnRef idx="1">
+            <a:schemeClr val="accent1"/>
+          </a:lnRef>
+          <a:fillRef idx="3">
+            <a:schemeClr val="accent1"/>
+          </a:fillRef>
+          <a:effectRef idx="2">
+            <a:schemeClr val="accent1"/>
+          </a:effectRef>
+          <a:fontRef idx="minor">
+            <a:schemeClr val="lt1"/>
+          </a:fontRef>
+        </p:style>
+        <p:txBody>
+          <a:bodyPr rtlCol="0" anchor="ctr"/>
+          <a:lstStyle/>
+          <a:p>
+            <a:pPr algn="ctr"/>
+          </a:p>
+        </p:txBody>
+      </p:sp>
+      <p:sp>
+        <p:nvSpPr>
+          <p:cNvPr id="14" name="Rounded Rectangle 13"/>
+          <p:cNvSpPr/>
+          <p:nvPr/>
+        </p:nvSpPr>
+        <p:spPr>
+          <a:xfrm>
+            <a:off x="3663452" y="4818156"/>
+            <a:ext cx="3975079" cy="399409"/>
+          </a:xfrm>
+          <a:prstGeom prst="roundRect">
+            <a:avLst/>
+          </a:prstGeom>
+          <a:noFill/>
+          <a:ln w="44450">
+            <a:solidFill>
+              <a:srgbClr val="FFD633"/>
+            </a:solidFill>
+          </a:ln>
+          <a:effectLst/>
+        </p:spPr>
+        <p:style>
+          <a:lnRef idx="1">
+            <a:schemeClr val="accent1"/>
+          </a:lnRef>
+          <a:fillRef idx="3">
+            <a:schemeClr val="accent1"/>
+          </a:fillRef>
+          <a:effectRef idx="2">
+            <a:schemeClr val="accent1"/>
+          </a:effectRef>
+          <a:fontRef idx="minor">
+            <a:schemeClr val="lt1"/>
+          </a:fontRef>
+        </p:style>
+        <p:txBody>
+          <a:bodyPr rtlCol="0" anchor="ctr"/>
+          <a:lstStyle/>
+          <a:p>
+            <a:pPr algn="ctr"/>
+          </a:p>
+        </p:txBody>
+      </p:sp>
+      <p:sp>
+        <p:nvSpPr>
+          <p:cNvPr id="15" name="TextBox 14"/>
           <p:cNvSpPr txBox="1"/>
           <p:nvPr/>
         </p:nvSpPr>
         <p:spPr>
           <a:xfrm>
-            <a:off x="548640" y="5623560"/>
-            <a:ext cx="11064240" cy="1051560"/>
+            <a:off x="822960" y="6172200"/>
+            <a:ext cx="10515600" cy="548640"/>
           </a:xfrm>
           <a:prstGeom prst="rect">
             <a:avLst/>
@@ -15767,10 +15862,10 @@
             <a:r>
               <a:rPr sz="2000">
                 <a:solidFill>
-                  <a:srgbClr val="DCECEF"/>
-                </a:solidFill>
-              </a:rPr>
-              <a:t>On hover, turn the border and text blue.</a:t>
+                  <a:srgbClr val="0A6299"/>
+                </a:solidFill>
+              </a:rPr>
+              <a:t>border-color sets the colour of the box's outline.</a:t>
             </a:r>
           </a:p>
         </p:txBody>
@@ -15829,7 +15924,7 @@
                   <a:srgbClr val="01AEFD"/>
                 </a:solidFill>
               </a:rPr>
-              <a:t>All together in style.css</a:t>
+              <a:t>Type this into style.css   -   line 99</a:t>
             </a:r>
           </a:p>
         </p:txBody>
@@ -15873,7 +15968,7 @@
             <a:r>
               <a:rPr sz="1300">
                 <a:solidFill>
-                  <a:srgbClr val="7FE0A0"/>
+                  <a:srgbClr val="6D8C97"/>
                 </a:solidFill>
                 <a:latin typeface="Consolas"/>
               </a:rPr>
@@ -15898,7 +15993,7 @@
             <a:r>
               <a:rPr sz="1300">
                 <a:solidFill>
-                  <a:srgbClr val="7FE0A0"/>
+                  <a:srgbClr val="6D8C97"/>
                 </a:solidFill>
                 <a:latin typeface="Consolas"/>
               </a:rPr>
@@ -15923,7 +16018,7 @@
             <a:r>
               <a:rPr sz="1300">
                 <a:solidFill>
-                  <a:srgbClr val="7FE0A0"/>
+                  <a:srgbClr val="6D8C97"/>
                 </a:solidFill>
                 <a:latin typeface="Consolas"/>
               </a:rPr>
@@ -15948,7 +16043,7 @@
             <a:r>
               <a:rPr sz="1300">
                 <a:solidFill>
-                  <a:srgbClr val="7FE0A0"/>
+                  <a:srgbClr val="6D8C97"/>
                 </a:solidFill>
                 <a:latin typeface="Consolas"/>
               </a:rPr>
@@ -15973,7 +16068,7 @@
             <a:r>
               <a:rPr sz="1300">
                 <a:solidFill>
-                  <a:srgbClr val="7FE0A0"/>
+                  <a:srgbClr val="6D8C97"/>
                 </a:solidFill>
                 <a:latin typeface="Consolas"/>
               </a:rPr>
@@ -15998,7 +16093,7 @@
             <a:r>
               <a:rPr sz="1300">
                 <a:solidFill>
-                  <a:srgbClr val="7FE0A0"/>
+                  <a:srgbClr val="6D8C97"/>
                 </a:solidFill>
                 <a:latin typeface="Consolas"/>
               </a:rPr>
@@ -16023,7 +16118,7 @@
             <a:r>
               <a:rPr sz="1300">
                 <a:solidFill>
-                  <a:srgbClr val="7FE0A0"/>
+                  <a:srgbClr val="6D8C97"/>
                 </a:solidFill>
                 <a:latin typeface="Consolas"/>
               </a:rPr>
@@ -16048,7 +16143,7 @@
             <a:r>
               <a:rPr sz="1300">
                 <a:solidFill>
-                  <a:srgbClr val="7FE0A0"/>
+                  <a:srgbClr val="6D8C97"/>
                 </a:solidFill>
                 <a:latin typeface="Consolas"/>
               </a:rPr>
@@ -16073,7 +16168,7 @@
             <a:r>
               <a:rPr sz="1300">
                 <a:solidFill>
-                  <a:srgbClr val="7FE0A0"/>
+                  <a:srgbClr val="6D8C97"/>
                 </a:solidFill>
                 <a:latin typeface="Consolas"/>
               </a:rPr>
@@ -16098,7 +16193,7 @@
             <a:r>
               <a:rPr sz="1300">
                 <a:solidFill>
-                  <a:srgbClr val="7FE0A0"/>
+                  <a:srgbClr val="6D8C97"/>
                 </a:solidFill>
                 <a:latin typeface="Consolas"/>
               </a:rPr>
@@ -16123,7 +16218,7 @@
             <a:r>
               <a:rPr sz="1300">
                 <a:solidFill>
-                  <a:srgbClr val="7FE0A0"/>
+                  <a:srgbClr val="6D8C97"/>
                 </a:solidFill>
                 <a:latin typeface="Consolas"/>
               </a:rPr>
@@ -16148,7 +16243,7 @@
             <a:r>
               <a:rPr sz="1300">
                 <a:solidFill>
-                  <a:srgbClr val="7FE0A0"/>
+                  <a:srgbClr val="6D8C97"/>
                 </a:solidFill>
                 <a:latin typeface="Consolas"/>
               </a:rPr>
@@ -16173,7 +16268,7 @@
             <a:r>
               <a:rPr sz="1300">
                 <a:solidFill>
-                  <a:srgbClr val="7FE0A0"/>
+                  <a:srgbClr val="6D8C97"/>
                 </a:solidFill>
                 <a:latin typeface="Consolas"/>
               </a:rPr>
@@ -16198,7 +16293,7 @@
             <a:r>
               <a:rPr sz="1300">
                 <a:solidFill>
-                  <a:srgbClr val="7FE0A0"/>
+                  <a:srgbClr val="6D8C97"/>
                 </a:solidFill>
                 <a:latin typeface="Consolas"/>
               </a:rPr>
@@ -16223,7 +16318,7 @@
             <a:r>
               <a:rPr sz="1300">
                 <a:solidFill>
-                  <a:srgbClr val="7FE0A0"/>
+                  <a:srgbClr val="6D8C97"/>
                 </a:solidFill>
                 <a:latin typeface="Consolas"/>
               </a:rPr>
@@ -16285,7 +16380,7 @@
                   <a:srgbClr val="DCECEF"/>
                 </a:solidFill>
               </a:rPr>
-              <a:t>That is the whole piece. Check yours looks the same before moving on.</a:t>
+              <a:t>On hover, turn the border and text blue.</a:t>
             </a:r>
           </a:p>
         </p:txBody>
@@ -16301,6 +16396,14 @@
 <file path=ppt/slides/slide49.xml><?xml version="1.0" encoding="utf-8"?>
 <p:sld xmlns:a="http://schemas.openxmlformats.org/drawingml/2006/main" xmlns:p="http://schemas.openxmlformats.org/presentationml/2006/main" xmlns:r="http://schemas.openxmlformats.org/officeDocument/2006/relationships">
   <p:cSld>
+    <p:bg>
+      <p:bgPr>
+        <a:solidFill>
+          <a:srgbClr val="102127"/>
+        </a:solidFill>
+        <a:effectLst/>
+      </p:bgPr>
+    </p:bg>
     <p:spTree>
       <p:nvGrpSpPr>
         <p:cNvPr id="1" name=""/>
@@ -16310,40 +16413,14 @@
       <p:grpSpPr/>
       <p:sp>
         <p:nvSpPr>
-          <p:cNvPr id="2" name="Title 1"/>
-          <p:cNvSpPr>
-            <a:spLocks noGrp="1"/>
-          </p:cNvSpPr>
-          <p:nvPr>
-            <p:ph type="title"/>
-          </p:nvPr>
-        </p:nvSpPr>
-        <p:spPr/>
-        <p:txBody>
-          <a:bodyPr/>
-          <a:lstStyle/>
-          <a:p>
-            <a:r>
-              <a:rPr sz="3800" b="1">
-                <a:solidFill>
-                  <a:srgbClr val="1F2A37"/>
-                </a:solidFill>
-              </a:rPr>
-              <a:t>One source of truth</a:t>
-            </a:r>
-          </a:p>
-        </p:txBody>
-      </p:sp>
-      <p:sp>
-        <p:nvSpPr>
-          <p:cNvPr id="3" name="TextBox 2"/>
+          <p:cNvPr id="2" name="TextBox 1"/>
           <p:cNvSpPr txBox="1"/>
           <p:nvPr/>
         </p:nvSpPr>
         <p:spPr>
           <a:xfrm>
-            <a:off x="822960" y="1828800"/>
-            <a:ext cx="10515600" cy="4206240"/>
+            <a:off x="502920" y="274320"/>
+            <a:ext cx="11155680" cy="548640"/>
           </a:xfrm>
           <a:prstGeom prst="rect">
             <a:avLst/>
@@ -16351,38 +16428,474 @@
           <a:noFill/>
         </p:spPr>
         <p:txBody>
+          <a:bodyPr wrap="none">
+            <a:spAutoFit/>
+          </a:bodyPr>
+          <a:lstStyle/>
+          <a:p>
+            <a:r>
+              <a:rPr sz="2200" b="1">
+                <a:solidFill>
+                  <a:srgbClr val="01AEFD"/>
+                </a:solidFill>
+              </a:rPr>
+              <a:t>All together in style.css</a:t>
+            </a:r>
+          </a:p>
+        </p:txBody>
+      </p:sp>
+      <p:sp>
+        <p:nvSpPr>
+          <p:cNvPr id="3" name="TextBox 2"/>
+          <p:cNvSpPr txBox="1"/>
+          <p:nvPr/>
+        </p:nvSpPr>
+        <p:spPr>
+          <a:xfrm>
+            <a:off x="502920" y="960120"/>
+            <a:ext cx="11155680" cy="4297680"/>
+          </a:xfrm>
+          <a:prstGeom prst="rect">
+            <a:avLst/>
+          </a:prstGeom>
+          <a:noFill/>
+        </p:spPr>
+        <p:txBody>
+          <a:bodyPr wrap="none">
+            <a:spAutoFit/>
+          </a:bodyPr>
+          <a:lstStyle/>
+          <a:p>
+            <a:pPr>
+              <a:spcAft>
+                <a:spcPts val="0"/>
+              </a:spcAft>
+            </a:pPr>
+            <a:r>
+              <a:rPr sz="1300">
+                <a:solidFill>
+                  <a:srgbClr val="6D8C97"/>
+                </a:solidFill>
+                <a:latin typeface="Consolas"/>
+              </a:rPr>
+              <a:t>  84  </a:t>
+            </a:r>
+            <a:r>
+              <a:rPr sz="1300">
+                <a:solidFill>
+                  <a:srgbClr val="7FE0A0"/>
+                </a:solidFill>
+                <a:latin typeface="Consolas"/>
+              </a:rPr>
+              <a:t>.bubble.writing::after {</a:t>
+            </a:r>
+          </a:p>
+          <a:p>
+            <a:pPr>
+              <a:spcAft>
+                <a:spcPts val="0"/>
+              </a:spcAft>
+            </a:pPr>
+            <a:r>
+              <a:rPr sz="1300">
+                <a:solidFill>
+                  <a:srgbClr val="6D8C97"/>
+                </a:solidFill>
+                <a:latin typeface="Consolas"/>
+              </a:rPr>
+              <a:t>  85  </a:t>
+            </a:r>
+            <a:r>
+              <a:rPr sz="1300">
+                <a:solidFill>
+                  <a:srgbClr val="7FE0A0"/>
+                </a:solidFill>
+                <a:latin typeface="Consolas"/>
+              </a:rPr>
+              <a:t>  content: "\258C";</a:t>
+            </a:r>
+          </a:p>
+          <a:p>
+            <a:pPr>
+              <a:spcAft>
+                <a:spcPts val="0"/>
+              </a:spcAft>
+            </a:pPr>
+            <a:r>
+              <a:rPr sz="1300">
+                <a:solidFill>
+                  <a:srgbClr val="6D8C97"/>
+                </a:solidFill>
+                <a:latin typeface="Consolas"/>
+              </a:rPr>
+              <a:t>  86  </a:t>
+            </a:r>
+            <a:r>
+              <a:rPr sz="1300">
+                <a:solidFill>
+                  <a:srgbClr val="7FE0A0"/>
+                </a:solidFill>
+                <a:latin typeface="Consolas"/>
+              </a:rPr>
+              <a:t>  color: #01aefd;</a:t>
+            </a:r>
+          </a:p>
+          <a:p>
+            <a:pPr>
+              <a:spcAft>
+                <a:spcPts val="0"/>
+              </a:spcAft>
+            </a:pPr>
+            <a:r>
+              <a:rPr sz="1300">
+                <a:solidFill>
+                  <a:srgbClr val="6D8C97"/>
+                </a:solidFill>
+                <a:latin typeface="Consolas"/>
+              </a:rPr>
+              <a:t>  87  </a:t>
+            </a:r>
+            <a:r>
+              <a:rPr sz="1300">
+                <a:solidFill>
+                  <a:srgbClr val="7FE0A0"/>
+                </a:solidFill>
+                <a:latin typeface="Consolas"/>
+              </a:rPr>
+              <a:t>  animation: blink 1s steps(2, start) infinite;</a:t>
+            </a:r>
+          </a:p>
+          <a:p>
+            <a:pPr>
+              <a:spcAft>
+                <a:spcPts val="0"/>
+              </a:spcAft>
+            </a:pPr>
+            <a:r>
+              <a:rPr sz="1300">
+                <a:solidFill>
+                  <a:srgbClr val="6D8C97"/>
+                </a:solidFill>
+                <a:latin typeface="Consolas"/>
+              </a:rPr>
+              <a:t>  88  </a:t>
+            </a:r>
+            <a:r>
+              <a:rPr sz="1300">
+                <a:solidFill>
+                  <a:srgbClr val="7FE0A0"/>
+                </a:solidFill>
+                <a:latin typeface="Consolas"/>
+              </a:rPr>
+              <a:t>}</a:t>
+            </a:r>
+          </a:p>
+          <a:p>
+            <a:pPr>
+              <a:spcAft>
+                <a:spcPts val="0"/>
+              </a:spcAft>
+            </a:pPr>
+            <a:r>
+              <a:rPr sz="1300">
+                <a:solidFill>
+                  <a:srgbClr val="6D8C97"/>
+                </a:solidFill>
+                <a:latin typeface="Consolas"/>
+              </a:rPr>
+              <a:t>  89  </a:t>
+            </a:r>
+            <a:r>
+              <a:rPr sz="1300">
+                <a:solidFill>
+                  <a:srgbClr val="7FE0A0"/>
+                </a:solidFill>
+                <a:latin typeface="Consolas"/>
+              </a:rPr>
+              <a:t>@keyframes blink { to { visibility: hidden; } }</a:t>
+            </a:r>
+          </a:p>
+          <a:p>
+            <a:pPr>
+              <a:spcAft>
+                <a:spcPts val="0"/>
+              </a:spcAft>
+            </a:pPr>
+            <a:r>
+              <a:rPr sz="1300">
+                <a:solidFill>
+                  <a:srgbClr val="6D8C97"/>
+                </a:solidFill>
+                <a:latin typeface="Consolas"/>
+              </a:rPr>
+              <a:t>  90  </a:t>
+            </a:r>
+            <a:r>
+              <a:rPr sz="1300">
+                <a:solidFill>
+                  <a:srgbClr val="7FE0A0"/>
+                </a:solidFill>
+                <a:latin typeface="Consolas"/>
+              </a:rPr>
+              <a:t>.presets { display: flex; flex-wrap: wrap; gap: 6px; margin-bottom: 8px; }</a:t>
+            </a:r>
+          </a:p>
+          <a:p>
+            <a:pPr>
+              <a:spcAft>
+                <a:spcPts val="0"/>
+              </a:spcAft>
+            </a:pPr>
+            <a:r>
+              <a:rPr sz="1300">
+                <a:solidFill>
+                  <a:srgbClr val="6D8C97"/>
+                </a:solidFill>
+                <a:latin typeface="Consolas"/>
+              </a:rPr>
+              <a:t>  91  </a:t>
+            </a:r>
+            <a:r>
+              <a:rPr sz="1300">
+                <a:solidFill>
+                  <a:srgbClr val="7FE0A0"/>
+                </a:solidFill>
+                <a:latin typeface="Consolas"/>
+              </a:rPr>
+              <a:t>.preset {</a:t>
+            </a:r>
+          </a:p>
+          <a:p>
+            <a:pPr>
+              <a:spcAft>
+                <a:spcPts val="0"/>
+              </a:spcAft>
+            </a:pPr>
+            <a:r>
+              <a:rPr sz="1300">
+                <a:solidFill>
+                  <a:srgbClr val="6D8C97"/>
+                </a:solidFill>
+                <a:latin typeface="Consolas"/>
+              </a:rPr>
+              <a:t>  92  </a:t>
+            </a:r>
+            <a:r>
+              <a:rPr sz="1300">
+                <a:solidFill>
+                  <a:srgbClr val="7FE0A0"/>
+                </a:solidFill>
+                <a:latin typeface="Consolas"/>
+              </a:rPr>
+              <a:t>  padding: 5px 11px;</a:t>
+            </a:r>
+          </a:p>
+          <a:p>
+            <a:pPr>
+              <a:spcAft>
+                <a:spcPts val="0"/>
+              </a:spcAft>
+            </a:pPr>
+            <a:r>
+              <a:rPr sz="1300">
+                <a:solidFill>
+                  <a:srgbClr val="6D8C97"/>
+                </a:solidFill>
+                <a:latin typeface="Consolas"/>
+              </a:rPr>
+              <a:t>  93  </a:t>
+            </a:r>
+            <a:r>
+              <a:rPr sz="1300">
+                <a:solidFill>
+                  <a:srgbClr val="7FE0A0"/>
+                </a:solidFill>
+                <a:latin typeface="Consolas"/>
+              </a:rPr>
+              <a:t>  border: 1px solid #dbe3ec;</a:t>
+            </a:r>
+          </a:p>
+          <a:p>
+            <a:pPr>
+              <a:spcAft>
+                <a:spcPts val="0"/>
+              </a:spcAft>
+            </a:pPr>
+            <a:r>
+              <a:rPr sz="1300">
+                <a:solidFill>
+                  <a:srgbClr val="6D8C97"/>
+                </a:solidFill>
+                <a:latin typeface="Consolas"/>
+              </a:rPr>
+              <a:t>  94  </a:t>
+            </a:r>
+            <a:r>
+              <a:rPr sz="1300">
+                <a:solidFill>
+                  <a:srgbClr val="7FE0A0"/>
+                </a:solidFill>
+                <a:latin typeface="Consolas"/>
+              </a:rPr>
+              <a:t>  border-radius: 20px;</a:t>
+            </a:r>
+          </a:p>
+          <a:p>
+            <a:pPr>
+              <a:spcAft>
+                <a:spcPts val="0"/>
+              </a:spcAft>
+            </a:pPr>
+            <a:r>
+              <a:rPr sz="1300">
+                <a:solidFill>
+                  <a:srgbClr val="6D8C97"/>
+                </a:solidFill>
+                <a:latin typeface="Consolas"/>
+              </a:rPr>
+              <a:t>  95  </a:t>
+            </a:r>
+            <a:r>
+              <a:rPr sz="1300">
+                <a:solidFill>
+                  <a:srgbClr val="7FE0A0"/>
+                </a:solidFill>
+                <a:latin typeface="Consolas"/>
+              </a:rPr>
+              <a:t>  background: #ffffff;</a:t>
+            </a:r>
+          </a:p>
+          <a:p>
+            <a:pPr>
+              <a:spcAft>
+                <a:spcPts val="0"/>
+              </a:spcAft>
+            </a:pPr>
+            <a:r>
+              <a:rPr sz="1300">
+                <a:solidFill>
+                  <a:srgbClr val="6D8C97"/>
+                </a:solidFill>
+                <a:latin typeface="Consolas"/>
+              </a:rPr>
+              <a:t>  96  </a:t>
+            </a:r>
+            <a:r>
+              <a:rPr sz="1300">
+                <a:solidFill>
+                  <a:srgbClr val="7FE0A0"/>
+                </a:solidFill>
+                <a:latin typeface="Consolas"/>
+              </a:rPr>
+              <a:t>  font-size: 13px;</a:t>
+            </a:r>
+          </a:p>
+          <a:p>
+            <a:pPr>
+              <a:spcAft>
+                <a:spcPts val="0"/>
+              </a:spcAft>
+            </a:pPr>
+            <a:r>
+              <a:rPr sz="1300">
+                <a:solidFill>
+                  <a:srgbClr val="6D8C97"/>
+                </a:solidFill>
+                <a:latin typeface="Consolas"/>
+              </a:rPr>
+              <a:t>  97  </a:t>
+            </a:r>
+            <a:r>
+              <a:rPr sz="1300">
+                <a:solidFill>
+                  <a:srgbClr val="7FE0A0"/>
+                </a:solidFill>
+                <a:latin typeface="Consolas"/>
+              </a:rPr>
+              <a:t>  cursor: pointer;</a:t>
+            </a:r>
+          </a:p>
+          <a:p>
+            <a:pPr>
+              <a:spcAft>
+                <a:spcPts val="0"/>
+              </a:spcAft>
+            </a:pPr>
+            <a:r>
+              <a:rPr sz="1300">
+                <a:solidFill>
+                  <a:srgbClr val="6D8C97"/>
+                </a:solidFill>
+                <a:latin typeface="Consolas"/>
+              </a:rPr>
+              <a:t>  98  </a:t>
+            </a:r>
+            <a:r>
+              <a:rPr sz="1300">
+                <a:solidFill>
+                  <a:srgbClr val="7FE0A0"/>
+                </a:solidFill>
+                <a:latin typeface="Consolas"/>
+              </a:rPr>
+              <a:t>}</a:t>
+            </a:r>
+          </a:p>
+          <a:p>
+            <a:pPr>
+              <a:spcAft>
+                <a:spcPts val="0"/>
+              </a:spcAft>
+            </a:pPr>
+            <a:r>
+              <a:rPr sz="1300">
+                <a:solidFill>
+                  <a:srgbClr val="6D8C97"/>
+                </a:solidFill>
+                <a:latin typeface="Consolas"/>
+              </a:rPr>
+              <a:t>  99  </a:t>
+            </a:r>
+            <a:r>
+              <a:rPr sz="1300">
+                <a:solidFill>
+                  <a:srgbClr val="7FE0A0"/>
+                </a:solidFill>
+                <a:latin typeface="Consolas"/>
+              </a:rPr>
+              <a:t>.preset:hover { border-color: #01aefd; color: #0a6299; }</a:t>
+            </a:r>
+          </a:p>
+        </p:txBody>
+      </p:sp>
+      <p:sp>
+        <p:nvSpPr>
+          <p:cNvPr id="4" name="TextBox 3"/>
+          <p:cNvSpPr txBox="1"/>
+          <p:nvPr/>
+        </p:nvSpPr>
+        <p:spPr>
+          <a:xfrm>
+            <a:off x="548640" y="5623560"/>
+            <a:ext cx="11064240" cy="1051560"/>
+          </a:xfrm>
+          <a:prstGeom prst="rect">
+            <a:avLst/>
+          </a:prstGeom>
+          <a:noFill/>
+        </p:spPr>
+        <p:txBody>
           <a:bodyPr wrap="square">
             <a:spAutoFit/>
           </a:bodyPr>
           <a:lstStyle/>
           <a:p>
-            <a:pPr>
-              <a:spcAft>
-                <a:spcPts val="1400"/>
-              </a:spcAft>
-            </a:pPr>
-            <a:r>
-              <a:rPr sz="2400">
-                <a:solidFill>
-                  <a:srgbClr val="1F2A37"/>
-                </a:solidFill>
-              </a:rPr>
-              <a:t>• The buttons come from the personalities</a:t>
-            </a:r>
-          </a:p>
-          <a:p>
-            <a:pPr>
-              <a:spcAft>
-                <a:spcPts val="1400"/>
-              </a:spcAft>
-            </a:pPr>
-            <a:r>
-              <a:rPr sz="2400">
-                <a:solidFill>
-                  <a:srgbClr val="1F2A37"/>
-                </a:solidFill>
-              </a:rPr>
-              <a:t>• They can never disagree with each other</a:t>
+            <a:r>
+              <a:rPr sz="2000">
+                <a:solidFill>
+                  <a:srgbClr val="DCECEF"/>
+                </a:solidFill>
+              </a:rPr>
+              <a:t>That is the whole piece. Check yours looks the same before moving on.</a:t>
             </a:r>
           </a:p>
         </p:txBody>
@@ -16641,6 +17154,103 @@
                   <a:srgbClr val="1F2A37"/>
                 </a:solidFill>
               </a:rPr>
+              <a:t>One source of truth</a:t>
+            </a:r>
+          </a:p>
+        </p:txBody>
+      </p:sp>
+      <p:sp>
+        <p:nvSpPr>
+          <p:cNvPr id="3" name="TextBox 2"/>
+          <p:cNvSpPr txBox="1"/>
+          <p:nvPr/>
+        </p:nvSpPr>
+        <p:spPr>
+          <a:xfrm>
+            <a:off x="822960" y="1828800"/>
+            <a:ext cx="10515600" cy="4206240"/>
+          </a:xfrm>
+          <a:prstGeom prst="rect">
+            <a:avLst/>
+          </a:prstGeom>
+          <a:noFill/>
+        </p:spPr>
+        <p:txBody>
+          <a:bodyPr wrap="square">
+            <a:spAutoFit/>
+          </a:bodyPr>
+          <a:lstStyle/>
+          <a:p>
+            <a:pPr>
+              <a:spcAft>
+                <a:spcPts val="1400"/>
+              </a:spcAft>
+            </a:pPr>
+            <a:r>
+              <a:rPr sz="2400">
+                <a:solidFill>
+                  <a:srgbClr val="1F2A37"/>
+                </a:solidFill>
+              </a:rPr>
+              <a:t>• The buttons come from the personalities</a:t>
+            </a:r>
+          </a:p>
+          <a:p>
+            <a:pPr>
+              <a:spcAft>
+                <a:spcPts val="1400"/>
+              </a:spcAft>
+            </a:pPr>
+            <a:r>
+              <a:rPr sz="2400">
+                <a:solidFill>
+                  <a:srgbClr val="1F2A37"/>
+                </a:solidFill>
+              </a:rPr>
+              <a:t>• They can never disagree with each other</a:t>
+            </a:r>
+          </a:p>
+        </p:txBody>
+      </p:sp>
+    </p:spTree>
+  </p:cSld>
+  <p:clrMapOvr>
+    <a:masterClrMapping/>
+  </p:clrMapOvr>
+</p:sld>
+</file>
+
+<file path=ppt/slides/slide51.xml><?xml version="1.0" encoding="utf-8"?>
+<p:sld xmlns:a="http://schemas.openxmlformats.org/drawingml/2006/main" xmlns:p="http://schemas.openxmlformats.org/presentationml/2006/main" xmlns:r="http://schemas.openxmlformats.org/officeDocument/2006/relationships">
+  <p:cSld>
+    <p:spTree>
+      <p:nvGrpSpPr>
+        <p:cNvPr id="1" name=""/>
+        <p:cNvGrpSpPr/>
+        <p:nvPr/>
+      </p:nvGrpSpPr>
+      <p:grpSpPr/>
+      <p:sp>
+        <p:nvSpPr>
+          <p:cNvPr id="2" name="Title 1"/>
+          <p:cNvSpPr>
+            <a:spLocks noGrp="1"/>
+          </p:cNvSpPr>
+          <p:nvPr>
+            <p:ph type="title"/>
+          </p:nvPr>
+        </p:nvSpPr>
+        <p:spPr/>
+        <p:txBody>
+          <a:bodyPr/>
+          <a:lstStyle/>
+          <a:p>
+            <a:r>
+              <a:rPr sz="3800" b="1">
+                <a:solidFill>
+                  <a:srgbClr val="1F2A37"/>
+                </a:solidFill>
+              </a:rPr>
               <a:t>Checkpoint: pick a character</a:t>
             </a:r>
           </a:p>
@@ -16755,7 +17365,7 @@
 </p:sld>
 </file>
 
-<file path=ppt/slides/slide51.xml><?xml version="1.0" encoding="utf-8"?>
+<file path=ppt/slides/slide52.xml><?xml version="1.0" encoding="utf-8"?>
 <p:sld xmlns:a="http://schemas.openxmlformats.org/drawingml/2006/main" xmlns:p="http://schemas.openxmlformats.org/presentationml/2006/main" xmlns:r="http://schemas.openxmlformats.org/officeDocument/2006/relationships">
   <p:cSld>
     <p:spTree>

--- a/ai101/slides/week-13.pptx
+++ b/ai101/slides/week-13.pptx
@@ -9697,7 +9697,7 @@
                   <a:srgbClr val="1F2A37"/>
                 </a:solidFill>
               </a:rPr>
-              <a:t>• A. A list of the character NAMES</a:t>
+              <a:t>• A. The prompts themselves</a:t>
             </a:r>
           </a:p>
           <a:p>
@@ -9712,7 +9712,7 @@
                   <a:srgbClr val="1F2A37"/>
                 </a:solidFill>
               </a:rPr>
-              <a:t>• B. The prompts themselves</a:t>
+              <a:t>• B. The number of characters</a:t>
             </a:r>
           </a:p>
           <a:p>
@@ -9727,7 +9727,7 @@
                   <a:srgbClr val="1F2A37"/>
                 </a:solidFill>
               </a:rPr>
-              <a:t>• C. The number of characters</a:t>
+              <a:t>• C. One button</a:t>
             </a:r>
           </a:p>
           <a:p>
@@ -9742,7 +9742,7 @@
                   <a:srgbClr val="1F2A37"/>
                 </a:solidFill>
               </a:rPr>
-              <a:t>• D. One button</a:t>
+              <a:t>• D. A list of the character NAMES</a:t>
             </a:r>
           </a:p>
           <a:p>
@@ -9872,7 +9872,7 @@
                   <a:srgbClr val="1F2A37"/>
                 </a:solidFill>
               </a:rPr>
-              <a:t>• A. A list of the character NAMES (correct)</a:t>
+              <a:t>• A. The prompts themselves</a:t>
             </a:r>
           </a:p>
           <a:p>
@@ -9887,7 +9887,7 @@
                   <a:srgbClr val="1F2A37"/>
                 </a:solidFill>
               </a:rPr>
-              <a:t>• B. The prompts themselves</a:t>
+              <a:t>• B. The number of characters</a:t>
             </a:r>
           </a:p>
           <a:p>
@@ -9902,7 +9902,7 @@
                   <a:srgbClr val="1F2A37"/>
                 </a:solidFill>
               </a:rPr>
-              <a:t>• C. The number of characters</a:t>
+              <a:t>• C. One button</a:t>
             </a:r>
           </a:p>
           <a:p>
@@ -9917,7 +9917,7 @@
                   <a:srgbClr val="1F2A37"/>
                 </a:solidFill>
               </a:rPr>
-              <a:t>• D. One button</a:t>
+              <a:t>• D. A list of the character NAMES (correct)</a:t>
             </a:r>
           </a:p>
           <a:p>
@@ -10047,7 +10047,7 @@
                   <a:srgbClr val="1F2A37"/>
                 </a:solidFill>
               </a:rPr>
-              <a:t>• A. Adding a character becomes ONE line in PRESETS</a:t>
+              <a:t>• A. Loops are faster</a:t>
             </a:r>
           </a:p>
           <a:p>
@@ -10062,7 +10062,7 @@
                   <a:srgbClr val="1F2A37"/>
                 </a:solidFill>
               </a:rPr>
-              <a:t>• B. Loops are faster</a:t>
+              <a:t>• B. Buttons must be looped</a:t>
             </a:r>
           </a:p>
           <a:p>
@@ -10077,7 +10077,7 @@
                   <a:srgbClr val="1F2A37"/>
                 </a:solidFill>
               </a:rPr>
-              <a:t>• C. Buttons must be looped</a:t>
+              <a:t>• C. To hide them</a:t>
             </a:r>
           </a:p>
           <a:p>
@@ -10092,7 +10092,7 @@
                   <a:srgbClr val="1F2A37"/>
                 </a:solidFill>
               </a:rPr>
-              <a:t>• D. To hide them</a:t>
+              <a:t>• D. Adding a character becomes ONE line in PRESETS</a:t>
             </a:r>
           </a:p>
           <a:p>
@@ -10334,7 +10334,7 @@
                   <a:srgbClr val="1F2A37"/>
                 </a:solidFill>
               </a:rPr>
-              <a:t>• A. Adding a character becomes ONE line in PRESETS (correct)</a:t>
+              <a:t>• A. Loops are faster</a:t>
             </a:r>
           </a:p>
           <a:p>
@@ -10349,7 +10349,7 @@
                   <a:srgbClr val="1F2A37"/>
                 </a:solidFill>
               </a:rPr>
-              <a:t>• B. Loops are faster</a:t>
+              <a:t>• B. Buttons must be looped</a:t>
             </a:r>
           </a:p>
           <a:p>
@@ -10364,7 +10364,7 @@
                   <a:srgbClr val="1F2A37"/>
                 </a:solidFill>
               </a:rPr>
-              <a:t>• C. Buttons must be looped</a:t>
+              <a:t>• C. To hide them</a:t>
             </a:r>
           </a:p>
           <a:p>
@@ -10379,7 +10379,7 @@
                   <a:srgbClr val="1F2A37"/>
                 </a:solidFill>
               </a:rPr>
-              <a:t>• D. To hide them</a:t>
+              <a:t>• D. Adding a character becomes ONE line in PRESETS (correct)</a:t>
             </a:r>
           </a:p>
           <a:p>
@@ -10509,7 +10509,7 @@
                   <a:srgbClr val="1F2A37"/>
                 </a:solidFill>
               </a:rPr>
-              <a:t>• A. the prompt for that character name</a:t>
+              <a:t>• A. a number</a:t>
             </a:r>
           </a:p>
           <a:p>
@@ -10524,7 +10524,7 @@
                   <a:srgbClr val="1F2A37"/>
                 </a:solidFill>
               </a:rPr>
-              <a:t>• B. a number</a:t>
+              <a:t>• B. the button</a:t>
             </a:r>
           </a:p>
           <a:p>
@@ -10539,7 +10539,7 @@
                   <a:srgbClr val="1F2A37"/>
                 </a:solidFill>
               </a:rPr>
-              <a:t>• C. the button</a:t>
+              <a:t>• C. the whole object</a:t>
             </a:r>
           </a:p>
           <a:p>
@@ -10554,7 +10554,7 @@
                   <a:srgbClr val="1F2A37"/>
                 </a:solidFill>
               </a:rPr>
-              <a:t>• D. the whole object</a:t>
+              <a:t>• D. the prompt for that character name</a:t>
             </a:r>
           </a:p>
           <a:p>
@@ -10684,7 +10684,7 @@
                   <a:srgbClr val="1F2A37"/>
                 </a:solidFill>
               </a:rPr>
-              <a:t>• A. the prompt for that character name (correct)</a:t>
+              <a:t>• A. a number</a:t>
             </a:r>
           </a:p>
           <a:p>
@@ -10699,7 +10699,7 @@
                   <a:srgbClr val="1F2A37"/>
                 </a:solidFill>
               </a:rPr>
-              <a:t>• B. a number</a:t>
+              <a:t>• B. the button</a:t>
             </a:r>
           </a:p>
           <a:p>
@@ -10714,7 +10714,7 @@
                   <a:srgbClr val="1F2A37"/>
                 </a:solidFill>
               </a:rPr>
-              <a:t>• C. the button</a:t>
+              <a:t>• C. the whole object</a:t>
             </a:r>
           </a:p>
           <a:p>
@@ -10729,7 +10729,7 @@
                   <a:srgbClr val="1F2A37"/>
                 </a:solidFill>
               </a:rPr>
-              <a:t>• D. the whole object</a:t>
+              <a:t>• D. the prompt for that character name (correct)</a:t>
             </a:r>
           </a:p>
           <a:p>
@@ -11209,7 +11209,7 @@
                   <a:srgbClr val="1F2A37"/>
                 </a:solidFill>
               </a:rPr>
-              <a:t>• A. The option the student picked (fast or smart)</a:t>
+              <a:t>• A. Always fast</a:t>
             </a:r>
           </a:p>
           <a:p>
@@ -11224,7 +11224,7 @@
                   <a:srgbClr val="1F2A37"/>
                 </a:solidFill>
               </a:rPr>
-              <a:t>• B. Always fast</a:t>
+              <a:t>• B. The option the student picked (fast or smart)</a:t>
             </a:r>
           </a:p>
           <a:p>
@@ -11384,7 +11384,7 @@
                   <a:srgbClr val="1F2A37"/>
                 </a:solidFill>
               </a:rPr>
-              <a:t>• A. The option the student picked (fast or smart) (correct)</a:t>
+              <a:t>• A. Always fast</a:t>
             </a:r>
           </a:p>
           <a:p>
@@ -11399,7 +11399,7 @@
                   <a:srgbClr val="1F2A37"/>
                 </a:solidFill>
               </a:rPr>
-              <a:t>• B. Always fast</a:t>
+              <a:t>• B. The option the student picked (fast or smart) (correct)</a:t>
             </a:r>
           </a:p>
           <a:p>

--- a/ai101/slides/week-13.pptx
+++ b/ai101/slides/week-13.pptx
@@ -15494,7 +15494,7 @@
         <p:spPr>
           <a:xfrm>
             <a:off x="3606393" y="2554833"/>
-            <a:ext cx="4945075" cy="1806854"/>
+            <a:ext cx="4945075" cy="1730776"/>
           </a:xfrm>
           <a:prstGeom prst="roundRect">
             <a:avLst/>
@@ -15669,6 +15669,94 @@
         </p:nvSpPr>
         <p:spPr>
           <a:xfrm>
+            <a:off x="3701491" y="4409236"/>
+            <a:ext cx="1426463" cy="228234"/>
+          </a:xfrm>
+          <a:prstGeom prst="roundRect">
+            <a:avLst/>
+          </a:prstGeom>
+          <a:solidFill>
+            <a:srgbClr val="16303A"/>
+          </a:solidFill>
+          <a:ln>
+            <a:noFill/>
+          </a:ln>
+          <a:effectLst/>
+        </p:spPr>
+        <p:style>
+          <a:lnRef idx="1">
+            <a:schemeClr val="accent1"/>
+          </a:lnRef>
+          <a:fillRef idx="3">
+            <a:schemeClr val="accent1"/>
+          </a:fillRef>
+          <a:effectRef idx="2">
+            <a:schemeClr val="accent1"/>
+          </a:effectRef>
+          <a:fontRef idx="minor">
+            <a:schemeClr val="lt1"/>
+          </a:fontRef>
+        </p:style>
+        <p:txBody>
+          <a:bodyPr rtlCol="0" anchor="ctr"/>
+          <a:lstStyle/>
+          <a:p>
+            <a:pPr algn="ctr"/>
+          </a:p>
+        </p:txBody>
+      </p:sp>
+      <p:sp>
+        <p:nvSpPr>
+          <p:cNvPr id="12" name="Rounded Rectangle 11"/>
+          <p:cNvSpPr/>
+          <p:nvPr/>
+        </p:nvSpPr>
+        <p:spPr>
+          <a:xfrm>
+            <a:off x="5223052" y="4409236"/>
+            <a:ext cx="1426463" cy="228234"/>
+          </a:xfrm>
+          <a:prstGeom prst="roundRect">
+            <a:avLst/>
+          </a:prstGeom>
+          <a:solidFill>
+            <a:srgbClr val="16303A"/>
+          </a:solidFill>
+          <a:ln>
+            <a:noFill/>
+          </a:ln>
+          <a:effectLst/>
+        </p:spPr>
+        <p:style>
+          <a:lnRef idx="1">
+            <a:schemeClr val="accent1"/>
+          </a:lnRef>
+          <a:fillRef idx="3">
+            <a:schemeClr val="accent1"/>
+          </a:fillRef>
+          <a:effectRef idx="2">
+            <a:schemeClr val="accent1"/>
+          </a:effectRef>
+          <a:fontRef idx="minor">
+            <a:schemeClr val="lt1"/>
+          </a:fontRef>
+        </p:style>
+        <p:txBody>
+          <a:bodyPr rtlCol="0" anchor="ctr"/>
+          <a:lstStyle/>
+          <a:p>
+            <a:pPr algn="ctr"/>
+          </a:p>
+        </p:txBody>
+      </p:sp>
+      <p:sp>
+        <p:nvSpPr>
+          <p:cNvPr id="13" name="Rounded Rectangle 12"/>
+          <p:cNvSpPr/>
+          <p:nvPr/>
+        </p:nvSpPr>
+        <p:spPr>
+          <a:xfrm>
             <a:off x="3701491" y="4856195"/>
             <a:ext cx="3899001" cy="323331"/>
           </a:xfrm>
@@ -15707,7 +15795,7 @@
       </p:sp>
       <p:sp>
         <p:nvSpPr>
-          <p:cNvPr id="12" name="Rounded Rectangle 11"/>
+          <p:cNvPr id="14" name="Rounded Rectangle 13"/>
           <p:cNvSpPr/>
           <p:nvPr/>
         </p:nvSpPr>
@@ -15751,7 +15839,7 @@
       </p:sp>
       <p:sp>
         <p:nvSpPr>
-          <p:cNvPr id="13" name="Rounded Rectangle 12"/>
+          <p:cNvPr id="15" name="Rounded Rectangle 14"/>
           <p:cNvSpPr/>
           <p:nvPr/>
         </p:nvSpPr>
@@ -15795,7 +15883,7 @@
       </p:sp>
       <p:sp>
         <p:nvSpPr>
-          <p:cNvPr id="14" name="Rounded Rectangle 13"/>
+          <p:cNvPr id="16" name="Rounded Rectangle 15"/>
           <p:cNvSpPr/>
           <p:nvPr/>
         </p:nvSpPr>
@@ -15839,7 +15927,7 @@
       </p:sp>
       <p:sp>
         <p:nvSpPr>
-          <p:cNvPr id="15" name="TextBox 14"/>
+          <p:cNvPr id="17" name="TextBox 16"/>
           <p:cNvSpPr txBox="1"/>
           <p:nvPr/>
         </p:nvSpPr>
